--- a/library/seminars/sem-06/rendered/sem-06-n4.pptx
+++ b/library/seminars/sem-06/rendered/sem-06-n4.pptx
@@ -517,43 +517,43 @@
           <a:p/>
           <a:p>
             <a:r>
-              <a:t>Прочитать самому: полный контроль над тем, что и в каком порядке читается, но окно сессии занимает содержимое сорока файлов, из которых для ответа нужен один вывод. Коллега: единственный вариант, способный ответить за минуту, и единственный, который зависит от чужого расписания. Субагент в своём окне: сорок файлов открываются и закрываются там, обратно приходит только итог. Скилл: пригодится при повторении, но при первом запуске читает те же файлы тем же способом в той же сессии. По памяти: мгновенно, проверки нет, а вопрос был именно про проверку.</a:t>
+              <a:t>Прочитать самому: полный контроль над порядком чтения, но контекст сессии занимает содержимое сорока файлов, из которых для правки нужны четыре. Вторая сессия: рабочий контекст остаётся чистым, и это правда — но список придётся переносить руками, а править агент будет по вашему пересказу. Условие про старые аккаунты выпадает из пересказа первым. Коллега: единственный вариант, способный ответить за минуту, и единственный, который зависит от чужого расписания. Роль: сорок файлов открываются и закрываются в её контексте, список приходит обратно сам. По памяти: мгновенно, но четвёртое место помнит не всякий из тех, кто его писал.</a:t>
             </a:r>
           </a:p>
           <a:p/>
           <a:p>
             <a:r>
-              <a:t>Теперь про «быстрее». Роль открывает все сорок файлов и читает их целиком. Двадцать минут чтения из сцены остаются двадцатью минутами: ни одна строчка не читается быстрее оттого, что её читает другой процесс.</a:t>
+              <a:t>Теперь про «быстрее». Роль открывает все сорок файлов и читает их целиком. Двадцать минут чтения остаются двадцатью минутами: ни одна строчка не читается быстрее оттого, что её читает другой процесс.</a:t>
             </a:r>
           </a:p>
           <a:p/>
           <a:p>
             <a:r>
-              <a:t>Выигрыш лежит в другом месте. Сорок файлов остаются в окне роли, и это окно закрывается вместе с ней. В сессию возвращается строка ответа — и то самое место, которого в сцене не хватило на собственную правку.</a:t>
+              <a:t>Выигрыш лежит в двух других местах. Чтение остаётся в контексте роли, и этот контекст закрывается вместе с ней. А список возвращается туда, где лежит правка, — сам, без вашего пересказа. Вторая сессия даёт только первое из двух.</a:t>
             </a:r>
           </a:p>
           <a:p/>
           <a:p>
             <a:r>
-              <a:t>Если спросят, зачем тогда вообще заводить роль, если время то же самое: ради того, что останется доступно дальше в этой же сессии. Двадцать минут чтения в сцене ушли на дело: ответ техническому директору был нужен. Час на повторное объяснение правки можно было не тратить вовсе, и экономит роль именно его. Механика разделения — на одностраничнике «Роль целиком» в начале ступени, блоки третий и четвёртый: что входит в окно роли и что уходит обратно.</a:t>
+              <a:t>Если спросят, зачем тогда вообще заводить роль, если время то же самое: ради того, что останется доступно дальше в этой же сессии. Двадцать минут чтения ушли на дело — список был нужен. Полчаса на повторное объяснение можно было не тратить вовсе, и экономит роль именно их. Механика разделения — на схеме базы ступени и на одностраничнике «Роль целиком», блоки третий и четвёртый.</a:t>
             </a:r>
           </a:p>
           <a:p/>
           <a:p>
             <a:r>
-              <a:t>Если прозвучит «а если запустить несколько ролей разом, тогда быстрее?»: тогда да, и это следующий кейс ступени целиком. Но быстрее там становится очередь из нескольких независимых задач; чтение одного вопроса остаётся тем же. Для одного вопроса из сорока файлов выигрыша по времени нет ни при каком числе ролей.</a:t>
+              <a:t>Если прозвучит «пересказ — ерунда, я просто скопирую ответ целиком»: тогда вы скопируете в рабочий контекст ровно то, от чего уходили, плюс потратите своё время на передачу. Чем короче то, что вы переносите, тем больше в нём потеряно; чем длиннее — тем меньше смысла было уносить чтение.</a:t>
             </a:r>
           </a:p>
           <a:p/>
           <a:p>
             <a:r>
+              <a:t>Если прозвучит «а если запустить несколько ролей разом, тогда быстрее?»: тогда да, и это следующий кейс ступени целиком. Но быстрее там становится очередь из нескольких независимых задач; чтение одного вопроса остаётся тем же. Для одного поиска по сорока файлам выигрыша по времени нет ни при каком числе ролей.</a:t>
+            </a:r>
+          </a:p>
+          <a:p/>
+          <a:p>
+            <a:r>
               <a:t>Если спросят, почему коллега вынесен в отдельную строку, если это не инструмент: потому что в жизни он первый кандидат и часто правильный. Строка нужна, чтобы это было сказано вслух: иначе вариант выглядит забытым.</a:t>
-            </a:r>
-          </a:p>
-          <a:p/>
-          <a:p>
-            <a:r>
-              <a:t>Если спросят про скилл: он решает повторяемость, не объём чтения. Записанный вопрос запускается тем же способом и в той же сессии, пока делегирование не заведено отдельно; эти два приёма складываются, и в третьем кейсе мы увидим, как именно.</a:t>
             </a:r>
           </a:p>
         </p:txBody>
@@ -623,13 +623,13 @@
           <a:lstStyle/>
           <a:p>
             <a:r>
-              <a:t>Через неделю правка приходит одна и крупная: новое поле в форме плюс изменение валидации. Вывод четверга он применяет буквально — больше ролей — и заводит вторую: тестировщика, который прогоняет сценарии через форму и проверяет поведение, не только код. Обе роли получают одну и ту же правку.</a:t>
+              <a:t>Через неделю он берётся за тот кусок, который мы в раскладке поставили неделимым: новое поле и изменение проверки формы. Исполнителей берёт по числу, которое в пятницу просилось само, — больше одного. Зовёт второго: тестировщика, который прогоняет сценарии через форму и проверяет поведение, не только код. Обе роли получают один и тот же кусок.</a:t>
             </a:r>
           </a:p>
           <a:p/>
           <a:p>
             <a:r>
-              <a:t>Диф-ревьюер проверяет код, видит, что валидация написана верно, возвращает </a:t>
+              <a:t>Диф-ревьюер проверяет код, видит, что проверка написана верно, возвращает </a:t>
             </a:r>
             <a:r>
               <a:rPr>
@@ -647,19 +647,19 @@
               <a:t>PASS</a:t>
             </a:r>
             <a:r>
-              <a:t>. Правка уходит в показ. Заказчик вводит email с пробелом перед доменом — случай, который не вошёл ни в код, который читали построчно, ни в сценарии, которые прогоняли руками.</a:t>
+              <a:t>. Правка уходит в показ. Заказчик вводит адрес с пробелом перед доменом — случай, который не вошёл ни в код, который читали построчно, ни в сценарии, которые прогоняли руками.</a:t>
             </a:r>
           </a:p>
           <a:p/>
           <a:p>
             <a:r>
-              <a:t>Оба ответа честные. Картина, которую он из них собрал, — «правка проверена» — не описывает ничего.</a:t>
+              <a:t>Оба ответа честные. Картина, которую он из них собрал, — «кусок проверен» — не описывает ничего.</a:t>
             </a:r>
           </a:p>
           <a:p/>
           <a:p>
             <a:r>
-              <a:t>И обратите внимание, что именно он повторил. Число ролей. Условия под ним не было: правка была одна, и две роли её не распараллелили — они её разрезали. Разрез кому-то нужно держать, и этого он не поручил никому.</a:t>
+              <a:t>И обратите внимание, что он здесь повторил. Число исполнителей. Условия под ним не было: кусок был один и неделимый, и две роли его не распараллелили — они его разрезали. Разрез кому-то нужно держать, и этого он не поручил никому.</a:t>
             </a:r>
           </a:p>
           <a:p/>
@@ -679,7 +679,7 @@
           <a:p>
             <a:r>
               <a:rPr i="1"/>
-              <a:t>Если спросят, почему диф-ревьюер не поймал опечатку в формате email.</a:t>
+              <a:t>Если спросят, почему диф-ревьюер не поймал пробел в адресе.</a:t>
             </a:r>
             <a:r>
               <a:t> Он проверял код </a:t>
@@ -691,17 +691,17 @@
               <a:t>validateForm</a:t>
             </a:r>
             <a:r>
-              <a:t> и видел, что логика написана верно. Пробел перед доменом не относится к тому, что эта правка меняла в коде: случай поведенческий, не структурный. Роль отработала ровно по своему описанию.</a:t>
+              <a:t> и видел, что логика написана верно. Пробел перед доменом не относится к тому, что этот кусок менял в коде: случай поведенческий, не структурный. Роль отработала ровно по своему описанию.</a:t>
             </a:r>
           </a:p>
           <a:p/>
           <a:p>
             <a:r>
               <a:rPr i="1"/>
-              <a:t>Если спросят, чем это отличается от четверга.</a:t>
-            </a:r>
-            <a:r>
-              <a:t> В четверг три копии одной роли закрывали три независимые задачи, и между задачами зазора не было — они и так лежали врозь. Здесь две разные роли делят одну задачу на стороны, и граница между сторонами оказалась никому не поручена. Разница ровно в том, было ли что делить.</a:t>
+              <a:t>Если спросят, чем это отличается от трёх независимых кусков.</a:t>
+            </a:r>
+            <a:r>
+              <a:t> Там между кусками зазора не было — они и так лежали врозь, и каждый закрывался целиком. Здесь две разные роли делят один кусок на стороны, и граница между сторонами оказалась никому не поручена. Разница ровно в том, было ли что делить.</a:t>
             </a:r>
           </a:p>
           <a:p/>
@@ -711,7 +711,16 @@
               <a:t>Если спросят, виноват ли тестировщик.</a:t>
             </a:r>
             <a:r>
-              <a:t> Нет, и это важно не смазать: он прогнал те сценарии, которые ему поручили, и честно о них отчитался. Подвела здесь не роль и не формулировка PASS. Подвело то, что никто не записал, где кончается зона каждого.</a:t>
+              <a:t> Нет, и это важно не смазать: он прогнал те сценарии, которые ему поручили, и честно о них отчитался. Подвела здесь не роль и не формулировка </a:t>
+            </a:r>
+            <a:r>
+              <a:rPr>
+                <a:latin typeface="Consolas"/>
+              </a:rPr>
+              <a:t>PASS</a:t>
+            </a:r>
+            <a:r>
+              <a:t>. Подвело то, что никто не записал, где кончается зона каждого.</a:t>
             </a:r>
           </a:p>
           <a:p/>
@@ -721,7 +730,7 @@
               <a:t>Если спросят, поймал ли бы промежуток человек без ролей.</a:t>
             </a:r>
             <a:r>
-              <a:t> Не обязательно. Но человек, читающий одну правку целиком, по крайней мере имел шанс споткнуться о пробел; два отчёта, каждый верный в своих границах, этот шанс забирают — именно потому, что оба зелёные. Проверка, которая закрывает часть поля и молчит про остальное, опаснее отсутствия проверки ровно настолько, насколько ей верят.</a:t>
+              <a:t> Не обязательно. Но человек, читающий кусок целиком, по крайней мере имел шанс споткнуться о пробел; два отчёта, каждый верный в своих границах, этот шанс забирают — именно потому, что оба зелёные. Проверка, которая закрывает часть поля и молчит про остальное, опаснее отсутствия проверки ровно настолько, насколько ей верят.</a:t>
             </a:r>
           </a:p>
         </p:txBody>
@@ -791,7 +800,7 @@
           <a:lstStyle/>
           <a:p>
             <a:r>
-              <a:t>Документация харнесса об устройстве контекстных окон приводит свой пример: роль прочитала 6100 токенов файлов, вы получили итог в 420 токенов — это и есть экономия контекста. Разница на порядок, и направление то же самое, что мы сейчас получили счётом: сорок файлов остаются в окне роли, в окно родителя приходит только итог.</a:t>
+              <a:t>Документация харнесса об устройстве контекста приводит свой пример: роль прочитала 6100 токенов файлов, вы получили итог в 420 токенов — это и есть экономия контекста. Разница на порядок, и направление то же самое, что мы сейчас получили счётом: сорок файлов остаются в контексте роли, в сессию приходит только итог.</a:t>
             </a:r>
           </a:p>
           <a:p/>
@@ -809,7 +818,7 @@
           <a:p/>
           <a:p>
             <a:r>
-              <a:t>Если спросят, что именно считалось бы честным измерением: один и тот же вопрос, прогнанный в двух режимах на выборке настоящих сессий — чтение в основном окне против делегирования, — с замером занятой доли окна в обоих. Такой работы в открытых источниках нет; если кто-то из вас её сделает на своём проекте, это ровно та цифра, которой курсу не хватает.</a:t>
+              <a:t>Если спросят, что именно считалось бы честным измерением: один и тот же вопрос, прогнанный в двух режимах на выборке настоящих сессий — чтение в рабочей сессии против делегирования, — с замером занятой доли контекста в обоих. Такой работы в открытых источниках нет; если кто-то из вас её сделает на своём проекте, это ровно та цифра, которой курсу не хватает.</a:t>
             </a:r>
           </a:p>
           <a:p/>
@@ -891,19 +900,19 @@
           <a:lstStyle/>
           <a:p>
             <a:r>
-              <a:t>Окно роли по умолчанию не настолько чистое, каким выглядело два экрана назад. Собственный промпт и свежий контекст она получает — и вместе с ними, по умолчанию, описания всех MCP-серверов родительской сессии целиком, даже тех, что её задаче не нужны ни одним инструментом. Дословно из документации по устранению ошибок: субагенты наследуют каждое описание MCP-инструмента из родительской сессии, и это может заполнить их контекстное окно ещё до первого шага — отключайте серверы, которыми не пользуетесь, перед тем как заводить субагентов.</a:t>
+              <a:t>Контекст роли чище вашего, но не чист от всего подряд. Свой промпт и свежее начало она получает — и вместе с ними, по умолчанию, описания всех подключённых серверов целиком, даже тех, что её задаче не нужны. Это третья полоса нашей схемы — она наследуется.</a:t>
             </a:r>
           </a:p>
           <a:p/>
           <a:p>
             <a:r>
-              <a:t>Для нашего вопроса про лимит участников: если в сессии подключены трекер задач и почта из прошлого блока занятия, роль, которой нужно прочитать сорок файлов кода, получает их описания в своё окно бесплатно.</a:t>
+              <a:t>Дословно из документации по устранению ошибок: роли наследуют каждое описание инструмента из вызвавшей сессии, и это может заполнить их контекст ещё до первого шага — отключайте серверы, которыми не пользуетесь, прежде чем заводить роли.</a:t>
             </a:r>
           </a:p>
           <a:p/>
           <a:p>
             <a:r>
-              <a:t>Фокус работает для содержимого репозитория. За подключённым серверами следят отдельно — тем же списком прав, который стоял пятым блоком на одностраничнике.</a:t>
+              <a:t>Фокус работает для содержимого репозитория. За подключёнными серверами следят отдельно — тем же списком прав, который стоит пятым блоком на одностраничнике.</a:t>
             </a:r>
           </a:p>
           <a:p/>
@@ -915,19 +924,19 @@
           <a:p/>
           <a:p>
             <a:r>
-              <a:t>Если спросят, сколько это стоит в окне: цифру зал уже видел в прошлом блоке занятия, там постоянная плата за подключённые серверы измерена в токенах и в доле окна. Здесь важно другое: эта плата вносится ещё раз, отдельно, в окно каждой заведённой роли.</a:t>
+              <a:t>Если спросят, сколько это стоит: цифру зал уже видел в прошлом блоке занятия, там постоянная плата за подключённые серверы измерена в токенах и в доле контекста. Здесь важно другое: эта плата вносится ещё раз, отдельно, в контекст каждой заведённой роли.</a:t>
             </a:r>
           </a:p>
           <a:p/>
           <a:p>
             <a:r>
-              <a:t>Если спросят, можно ли подключить сервер только роли, не трогая сессию: можно, и это обратный приём той же механики. Роль умеет объявить нужный ей сервер у себя — он поднимается на её старте и отключается на её завершении, а окно родителя его описаний не видит вовсе. Для тяжёлого сервера, нужного одной задаче, это дешевле, чем держать его подключённым всю сессию.</a:t>
+              <a:t>Если спросят, можно ли подключить сервер только роли, не трогая сессию: можно, и это обратный приём той же механики. Роль умеет объявить нужный ей сервер у себя — он поднимается на её старте и отключается на её завершении, а контекст вызвавшей сессии его описаний не видит вовсе. Для тяжёлого сервера, нужного одной задаче, это дешевле, чем держать его подключённым всю сессию.</a:t>
             </a:r>
           </a:p>
           <a:p/>
           <a:p>
             <a:r>
-              <a:t>Если спросят, относится ли то же к хукам и скиллам: механика у них своя, и сегодня мы её не разбираем. Здесь достаточно одного: отключение ненужных серверов — это осознанный ход перед заведением роли. Разовая уборка в начале дня его не заменяет, потому что сессия обрастает серверами по ходу работы.</a:t>
+              <a:t>Если спросят, относится ли то же к хукам и скиллам: механика у них своя, и сегодня мы её не разбираем. Здесь достаточно одного: отключение ненужных серверов — осознанный ход перед заведением роли. Разовая уборка в начале дня его не заменяет, потому что сессия обрастает серверами по ходу работы.</a:t>
             </a:r>
           </a:p>
         </p:txBody>
@@ -997,37 +1006,43 @@
           <a:lstStyle/>
           <a:p>
             <a:r>
-              <a:t>Делегировать чтение имеет смысл, когда из десятков файлов нужно вынести короткий вывод: факт, да или нет, список в несколько строк. Если работа продолжается на том же материале — рефакторинг, который трогает те же сорок файлов, — читать их придётся в любом случае, и делать это в своём окне тогда входит в саму работу: дальше с содержимым работать вам, а роль прочитала и исчезла.</a:t>
+              <a:t>Делегировать чтение имеет смысл, когда из десятков файлов нужно вынести короткий вывод: список мест в несколько строк, по которому дальше и работают. Сорок файлов поиска и четыре файла правки — ровно этот случай.</a:t>
             </a:r>
           </a:p>
           <a:p/>
           <a:p>
             <a:r>
-              <a:t>Что мы заводим ради контекста — решаем по тому, что останется в окне после ответа, и не по тому, сколько файлов пришлось открыть. Интуиция говорила: отдельный исполнитель прочитает быстрее. Проверка показала: сорок файлов остаются сорока файлами и тем же временем, меняется только чьё окно их держит.</a:t>
+              <a:t>Если дальше работать придётся со всем прочитанным объёмом — рефакторинг, который трогает те же сорок файлов, — читать их придётся в любом случае, и делать это в своём контексте тогда входит в саму работу: дальше с содержимым работать вам.</a:t>
             </a:r>
           </a:p>
           <a:p/>
           <a:p>
             <a:r>
-              <a:t>И к себе. Назовите про себя вопрос из своего проекта, ответ на который — одна строка, а чтения под него — полрепозитория. Назвали — вот первый кандидат на делегирование. А если после ответа вы продолжаете работать в тех же файлах, кандидат не он.</a:t>
+              <a:t>Что мы заводим ради контекста — решаем по тому, что останется в контексте после ответа, и не по тому, сколько файлов пришлось открыть. Интуиция говорила: отдельный исполнитель прочитает быстрее. Проверка показала: сорок файлов остаются сорока файлами и тем же временем, а меняются двое — чей контекст их держит и куда сам возвращается итог.</a:t>
             </a:r>
           </a:p>
           <a:p/>
           <a:p>
             <a:r>
-              <a:t>Если спросят про границу из прошлого слайда: тот же принцип применяется и к ней. Подключили роли лишние серверы — из её окна в родительское всё равно вернётся только итог, но само окно роли будет занято раньше и сильнее, чем нужно. Экономия контекста считается с этой оговоркой. Критерий она оставляет в силе и уточняет только размер самой экономии.</a:t>
+              <a:t>И к себе. Назовите про себя место в своём проекте, где перед правкой приходится искать по десяткам файлов, а находятся три-четыре строки. Назвали — вот первый кандидат на делегирование. А если править вы будете все эти же десятки файлов, кандидат не он.</a:t>
             </a:r>
           </a:p>
           <a:p/>
           <a:p>
             <a:r>
-              <a:t>Если спросят, где проходит граница между «коротким выводом» и «продолжением работы»: по тому, нужен ли вам дальше сам материал. Ответ на вопрос технического директора был нужен один раз — содержимое сорока файлов для него не пригодилось бы больше никогда. Правка в тех же файлах — другое дело: там содержимое и есть предмет работы.</a:t>
+              <a:t>Если спросят про границу из прошлого слайда: тот же принцип применяется и к ней. Подключили роли лишние серверы — обратно всё равно вернётся только итог, но контекст роли будет занят раньше и сильнее, чем нужно. Экономия считается с этой оговоркой; критерий она оставляет в силе и уточняет только размер самой экономии.</a:t>
             </a:r>
           </a:p>
           <a:p/>
           <a:p>
             <a:r>
-              <a:t>Если спросят, можно ли попросить роль вернуть пересказ прочитанного вместо вывода: технически можно, и экономия на этом кончается. Роль, которой велели пересказать сорок файлов, вернёт в ваше окно те же сорок файлов, только своими словами. Формат ответа роли — часть критерия, не деталь оформления.</a:t>
+              <a:t>Если спросят, где именно проходит граница между «коротким выводом» и «работой со всем объёмом»: по тому, нужен ли вам дальше весь материал или адреса внутри него. Герою понадобились четыре места из сорока файлов; содержимое остальных тридцати шести не пригодилось бы ему больше никогда. Рефакторинг тех же сорока — другое дело: там содержимое и есть предмет работы.</a:t>
+            </a:r>
+          </a:p>
+          <a:p/>
+          <a:p>
+            <a:r>
+              <a:t>Если спросят, можно ли попросить роль вернуть пересказ прочитанного вместо вывода: технически можно, и экономия на этом кончается. Роль, которой велели пересказать сорок файлов, вернёт в ваш контекст те же сорок файлов, только своими словами. Формат ответа роли — часть критерия, не деталь оформления. Ровно та же арифметика, что со второй сессией: чем длиннее то, что возвращается, тем меньше смысла было уносить чтение.</a:t>
             </a:r>
           </a:p>
           <a:p/>
@@ -1103,7 +1118,13 @@
           <a:lstStyle/>
           <a:p>
             <a:r>
-              <a:t>Три задачи сразу, и друг от друга они не зависят. Очевидный ход — запустить разом. Он сработает, вы увидите это на следующем экране. А через неделю тот же разработчик повторит его там, где он не работает, и заплатит больше, чем сэкономил в первый раз. Что именно сработало тогда и чего не хватило потом — в этом весь кейс.</a:t>
+              <a:t>Следующая развилка — практика. Задачу принесу я, раскладывать будем вместе, а решение, чем её ускорять, принимает зал.</a:t>
+            </a:r>
+          </a:p>
+          <a:p/>
+          <a:p>
+            <a:r>
+              <a:t>Средств для этого больше одного, и одно из них — то, о котором ступень: отдельный исполнитель. Остальные старше его и часто дешевле. Весь кейс о том, как между ними выбирают. Выбор этот делает сама задача, и увидеть его можно только разложив её.</a:t>
             </a:r>
           </a:p>
           <a:p/>
@@ -1123,10 +1144,10 @@
           <a:p>
             <a:r>
               <a:rPr i="1"/>
-              <a:t>Если прозвучит «зачем вообще ждать по очереди, если можно сразу».</a:t>
-            </a:r>
-            <a:r>
-              <a:t> Честный вопрос, и весь кейс — развёрнутый ответ на него: сначала случай, где «сразу» и правда выигрывает, потом случай, где тот же приём на похожей с виду задаче оставляет дыру в проверке.</a:t>
+              <a:t>Если прозвучит «а зачем раскладывать, если можно просто начать делать».</a:t>
+            </a:r>
+            <a:r>
+              <a:t> Честный вопрос, и практика — развёрнутый ответ на него. Задача, взятая целиком, допускает один порядок работы: от начала к концу. Разложенная допускает несколько, и среди них бывает заметно короче. Увидеть это можно только после раскладки, поэтому она идёт первой.</a:t>
             </a:r>
           </a:p>
           <a:p/>
@@ -1136,7 +1157,7 @@
               <a:t>Если спросят, почему развилка задана вопросом.</a:t>
             </a:r>
             <a:r>
-              <a:t> Потому что ответ на него у зала уже есть и он наполовину верный. Выигрыш будет, но придёт он не оттуда, откуда его ждут, — и кейс нужен ровно для того, чтобы отделить одно от другого. Утверждение на развилке отняло бы у разбора его работу.</a:t>
+              <a:t> Потому что ответ на него у зала уже есть, и он наполовину верный. Ускорить получится, но средство придёт не с той стороны, с которой его ждут. Утверждение на развилке отняло бы у практики её работу; вопрос её оставляет.</a:t>
             </a:r>
           </a:p>
           <a:p/>
@@ -1146,7 +1167,7 @@
               <a:t>Если спросят, не повтор ли это прошлого кейса.</a:t>
             </a:r>
             <a:r>
-              <a:t> Прошлый кейс отвечал на вопрос «что делать, когда одна задача не помещается в окно»: роль берёт чтение на себя. Этот отвечает на другой: «что делать, когда задач несколько и каждая помещается». Общее у них одно — отдельный исполнитель; причины завести его разные, и границы у этих причин тоже разные.</a:t>
+              <a:t> Прошлый отвечал на вопрос «что делать, когда чтение под один ответ не помещается в контекст сессии»: исполнитель читает в своём контексте. Этот отвечает на другой: «что делать, когда задача одна, а срок у неё — понедельник». Общее у них одно — отдельный исполнитель как один из ходов; причины его завести разные, и границы у этих причин тоже разные.</a:t>
             </a:r>
           </a:p>
           <a:p/>
@@ -1156,7 +1177,7 @@
               <a:t>Чего на развилке нет.</a:t>
             </a:r>
             <a:r>
-              <a:t> Нет слова «роль» и нет названия приёма: развилка называет наблюдаемую проблему и не называет решения — то же соглашение, что на пяти остальных развилках занятия. Если кто-то уже произнёс слово «субагент» вслух, поправлять не нужно: через экран мы к нему и придём, просто называть решение раньше вопроса смысла нет.</a:t>
+              <a:t> Нет слова «роль» и нет названия средства: развилка называет наблюдаемую проблему и не называет решения — то же соглашение, что на пяти остальных развилках занятия. Если кто-то уже произнёс слово «субагент» вслух, поправлять не нужно: к нему мы придём, просто это одна карточка из пяти.</a:t>
             </a:r>
           </a:p>
         </p:txBody>
@@ -1226,19 +1247,31 @@
           <a:lstStyle/>
           <a:p>
             <a:r>
-              <a:t>Диф-ревьюер — та самая роль, которую мы видели целиком на одностраничнике ступени, — у разработчика уже каждый день в работе. В четверг правок сразу три: поправки в трёх разных, не связанных друг с другом формах. Обычно это означало то же, что всегда: запустить проверку первой, подождать итог, запустить вторую, снова подождать, и только потом третью.</a:t>
+              <a:t>Пятница, без двадцати шесть. В чат приходит одна фраза: к понедельнику форма должна быть готова к рекламе. Это вся постановка, другой не будет.</a:t>
             </a:r>
           </a:p>
           <a:p/>
           <a:p>
             <a:r>
-              <a:t>В этот раз он запускает все три одним действием, без единой строки настройки: три отдельных вызова одной и той же роли, каждый на свою правку. Роли не знают друг о друге и ничего между собой не делят — у каждой свой контекст и свой набор файлов, нужных именно для её правки. Итоги приходят примерно тогда же, когда пришёл бы один.</a:t>
+              <a:t>Первый ход за вами. Что в этой задаче лежит? Называйте кусками, я записываю на экран.</a:t>
             </a:r>
           </a:p>
           <a:p/>
           <a:p>
             <a:r>
-              <a:t>Вечер четверга он заканчивает довольным и с выводом для себя: больше ролей — быстрее, дальше делаем так всегда. Запомните эту формулировку дословно. Через два экрана он применит её ещё раз, и она будет стоить ему недели.</a:t>
+              <a:t>Шесть. Теперь второй ход, и он весит больше первого: по каждому куску — от чего он зависит. Нужен ли ему итог другого куска. Лезет ли он в тот же файл, что сосед.</a:t>
+            </a:r>
+          </a:p>
+          <a:p/>
+          <a:p>
+            <a:r>
+              <a:t>И пока идёт второй ход, назовите вслух первое, что просится: сколько исполнителей вы бы завели на эти шесть кусков. Своё число запомните — через два экрана мы его проверим.</a:t>
+            </a:r>
+          </a:p>
+          <a:p/>
+          <a:p>
+            <a:r>
+              <a:t>Считаем, что вышло. Независимых кусков три из шести. Один ждёт, пока появится поле, — на узком экране нечего проверять, пока проверять не на чем. Один лезет в тот же файл, что и поле. Один повторяется после каждого из остальных.</a:t>
             </a:r>
           </a:p>
           <a:p/>
@@ -1258,40 +1291,50 @@
           <a:p>
             <a:r>
               <a:rPr i="1"/>
-              <a:t>Если спросят, сколько именно времени он сэкономил.</a:t>
-            </a:r>
-            <a:r>
-              <a:t> Точной цифры нет, и выдумывать её не нужно: ни один источник этой ступени ожидание на таких запусках не мерил. Честный порядок величины — три проверки вместо трёх ожиданий подряд; длина самой проверки при этом не меняется, меняется только то, складываются ли ожидания.</a:t>
+              <a:t>Если зал назовёт другие куски.</a:t>
+            </a:r>
+            <a:r>
+              <a:t> Это нормально и даже лучше: раскладка у каждого своя, и спорить о её составе полезнее, чем о числе. Держать нужно одно — чтобы по каждому названному куску прозвучал ответ на вопрос второго хода. Шесть строк на экране — опора на случай, если зал встанет; списывать с них нечего.</a:t>
             </a:r>
           </a:p>
           <a:p/>
           <a:p>
             <a:r>
               <a:rPr i="1"/>
-              <a:t>Если спросят, не мешают ли три вызова друг другу.</a:t>
-            </a:r>
-            <a:r>
-              <a:t> Нет, и это важная часть выигрыша: у каждого вызова своё окно и свой набор прочитанных файлов. Ровно поэтому три правки должны быть независимы — делить им нечего, и пересечься они могут только через сам код, если правки лежат в одном месте.</a:t>
+              <a:t>Если спросят, почему прогон перед выкладкой попал в куски.</a:t>
+            </a:r>
+            <a:r>
+              <a:t> Потому что его называют почти всегда, и это точный ответ: работа есть, время она занимает. Отличается он от соседей другим — он повторяется после каждого из них, то есть в задаче он стоит пять раз. На этом отличии держится одна из карточек следующего экрана.</a:t>
             </a:r>
           </a:p>
           <a:p/>
           <a:p>
             <a:r>
               <a:rPr i="1"/>
-              <a:t>Если спросят, можно ли на той же фактуре показать и предел выгоды.</a:t>
-            </a:r>
-            <a:r>
-              <a:t> Да, и дальше в этом кейсе разбираем именно это: две разные роли на разные стороны одной и той же правки — вместо трёх копий одной роли на три разные правки.</a:t>
+              <a:t>Если зал сразу назовёт средство вместо куска.</a:t>
+            </a:r>
+            <a:r>
+              <a:t> Записать и вернуть к ходу: средство выбираем на следующем экране, здесь договариваемся, из чего задача состоит. Иначе выбор средства уедет вперёд раскладки, а именно раскладка его и решает.</a:t>
             </a:r>
           </a:p>
           <a:p/>
           <a:p>
             <a:r>
               <a:rPr i="1"/>
-              <a:t>Если спросят, зачем на экране висит его собственный вывод.</a:t>
-            </a:r>
-            <a:r>
-              <a:t> Он висит там как улика. Вывод наполовину верный, и именно поэтому его легко повторить не в том месте — что через неделю и произойдёт. Неверные уроки обычно и выглядят так: короткая формулировка, снятая с настоящей удачи, в которой потеряно условие, при котором удача случилась.</a:t>
+              <a:t>Если спросят, зачем называть число исполнителей вслух.</a:t>
+            </a:r>
+            <a:r>
+              <a:t> Чтобы его было с чем сверить. Названное про себя число легко задним числом поправить; названное вслух остаётся. Через два экрана рядом с ним встанет число независимых кусков, и сверять будет что.</a:t>
+            </a:r>
+          </a:p>
+          <a:p/>
+          <a:p>
+            <a:r>
+              <a:rPr i="1"/>
+              <a:t>Если зал молчит.</a:t>
+            </a:r>
+            <a:r>
+              <a:t> Начать с конца: спросить, что обязано быть сделано к понедельнику, чтобы рекламу можно было запускать. Два куска из шести называются сразу, остальные подтягиваются за ними.</a:t>
             </a:r>
           </a:p>
         </p:txBody>
@@ -1361,7 +1404,19 @@
           <a:lstStyle/>
           <a:p>
             <a:r>
-              <a:t>Сработало. Что из этого стоит взять в привычку? Выберите карточку — и, выбирая, ответьте себе на второй вопрос: что именно дало выигрыш в четверг. Три роли, которые работали разом, или три задачи, которые друг от друга не зависели. Эти два ответа ведут к разным привычкам, и карточки написаны так, что разницу видно. Обоснование обязательно: назовите условие, при котором ваша карточка остаётся верной.</a:t>
+              <a:t>Задача разложена. Чем ускоряем? Выберите карточку — и назовите кусок, на котором ваше средство работает. Карточка без куска не считается: ровно в этой паре и лежит весь выбор.</a:t>
+            </a:r>
+          </a:p>
+          <a:p/>
+          <a:p>
+            <a:r>
+              <a:t>Пять средств. Отдельный исполнитель, о котором ступень, — одно из них, третья карточка слева. Остальные четыре старше его, и каждое из них на каком-то из наших шести кусков дешевле.</a:t>
+            </a:r>
+          </a:p>
+          <a:p/>
+          <a:p>
+            <a:r>
+              <a:t>Обоснование обязательно: назовите кусок и назовите, за счёт чего ваше средство на нём выигрывает.</a:t>
             </a:r>
           </a:p>
           <a:p/>
@@ -1381,30 +1436,40 @@
           <a:p>
             <a:r>
               <a:rPr i="1"/>
-              <a:t>Если прозвучит «параллелить всегда».</a:t>
-            </a:r>
-            <a:r>
-              <a:t> Сильный ответ и честный — именно его наш разработчик для себя и сформулировал в четверг. Спорить сейчас не нужно; разбор покажет, где он подводит, а вторая сцена кейса покажет, во сколько это обходится. Если карточку выбрали многие — тем лучше: зал и герой ошибутся одинаково, и дальше будет интереснее.</a:t>
+              <a:t>Если прозвучит «роли, и на все куски сразу».</a:t>
+            </a:r>
+            <a:r>
+              <a:t> Сильный ответ и честный — его называют чаще остальных, и ровно его через экран проверит разбор. Спорить сейчас не нужно. Если так ответили многие, тем лучше: зал и наш разработчик ошибутся одинаково, и дальше будет интереснее.</a:t>
             </a:r>
           </a:p>
           <a:p/>
           <a:p>
             <a:r>
               <a:rPr i="1"/>
-              <a:t>Если прозвучит «объединить три правки в одно задание».</a:t>
-            </a:r>
-            <a:r>
-              <a:t> Распространённый и на вид экономный выбор: один вызов вместо трёх. Стоит спросить у отвечающего, что роль будет держать в голове одновременно и как он отличит находку по первой правке от находки по третьей.</a:t>
+              <a:t>Если прозвучит «сузить задачу».</a:t>
+            </a:r>
+            <a:r>
+              <a:t> Недооценённый ход, и он единственный, который убирает работу вовсе. Стоит спросить у отвечающего, кто в его проекте имеет право сузить: чаще это не исполнитель, и тогда ход становится разговором о сроке.</a:t>
             </a:r>
           </a:p>
           <a:p/>
           <a:p>
             <a:r>
               <a:rPr i="1"/>
-              <a:t>Если прозвучит «ничего не менять».</a:t>
-            </a:r>
-            <a:r>
-              <a:t> Тоже защитимо, и у этого варианта есть своя область: на двух правках разница в ожидании невелика, и предсказуемость порядка стоит дороже. Пусть отвечающий назовёт, при каком числе правок его ответ перестанет работать.</a:t>
+              <a:t>Если прозвучит «по очереди».</a:t>
+            </a:r>
+            <a:r>
+              <a:t> Защитимо: порядок один и предсказуемый, ничего не сталкивается. Пусть отвечающий назовёт, на каком числе кусков его ответ начнёт проигрывать.</a:t>
+            </a:r>
+          </a:p>
+          <a:p/>
+          <a:p>
+            <a:r>
+              <a:rPr i="1"/>
+              <a:t>Если прозвучит «несколько сессий».</a:t>
+            </a:r>
+            <a:r>
+              <a:t> Спросить, что будет, когда две сессии дойдут до поля и до сообщений об ошибках: оба куска живут в одном файле. Это та развилка, про которую будет отдельный разговор дальше в занятии.</a:t>
             </a:r>
           </a:p>
           <a:p/>
@@ -1414,17 +1479,17 @@
               <a:t>Если зал выбирает молча.</a:t>
             </a:r>
             <a:r>
-              <a:t> Просить обоснование нужно до разбора, не после: половина ценности голосования в том, что условие проговаривается вслух раньше, чем его назовёт разбор.</a:t>
+              <a:t> Просить обоснование нужно до разбора, не после: половина ценности голосования в том, что кусок и условие проговариваются вслух раньше, чем их назовёт разбор.</a:t>
             </a:r>
           </a:p>
           <a:p/>
           <a:p>
             <a:r>
               <a:rPr i="1"/>
-              <a:t>Если спросят, можно ли выбрать две карточки сразу.</a:t>
-            </a:r>
-            <a:r>
-              <a:t> Нельзя, и это сделано намеренно. В прежней версии целевой ответ был связкой двух карточек, и выбор получался нечестным: правильным считалось то, чего вопрос не предлагал. Сейчас обе половины целевого ответа стоят в одной карточке, и одиночный выбор снова что-то значит.</a:t>
+              <a:t>Если спросят, можно ли выбрать две карточки.</a:t>
+            </a:r>
+            <a:r>
+              <a:t> Нельзя, и это намеренно: карточка плюс кусок — уже полный ответ. Две карточки означают два куска, то есть две раскладки, и выбор перестаёт что-либо значить.</a:t>
             </a:r>
           </a:p>
         </p:txBody>
@@ -1494,19 +1559,25 @@
           <a:lstStyle/>
           <a:p>
             <a:r>
-              <a:t>Первая карточка: порядок предсказуемый, но ожидания складываются — три проверки по очереди займут втрое больше, чем одна. Вторая: один вызов и одна формулировка, зато роль держит три независимых диффа сразу, и находки по одной правке легко спутать с находками по другой. Четвёртая, «параллелить всегда»: экономит там, где правки и так независимы, — и ровно туда наш разработчик через неделю наступит.</a:t>
+              <a:t>Таблицу читать вслух я не буду, пройдём по решению.</a:t>
             </a:r>
           </a:p>
           <a:p/>
           <a:p>
             <a:r>
-              <a:t>Целевая — третья, и это один приём в два шага: сначала подтвердить независимость, потом запускать по вызову роли на задачу.</a:t>
+              <a:t>По очереди: порядок предсказуемый, но три независимых куска ждут друг друга без причины — ожидания складываются. Несколько сессий: куски идут одновременно, только поле и сообщения живут в одном файле, и две сессии в одной папке дойдут до него обе. Повторяемое в проверку: прогон перед выкладкой уходит из очереди совсем, писать её надо заранее и один раз. Сузить: для рекламы нужны поле и согласие, два куска из шести — и решает это тот, кто отвечает за срок.</a:t>
             </a:r>
           </a:p>
           <a:p/>
           <a:p>
             <a:r>
-              <a:t>А теперь поворот, ради которого кейс и собран. Выигрыш в четверг дала независимость трёх задач; роли её только забрали. Параллельность лежит в задаче: роли берут её там, где она есть, и умножают ошибку там, где её нет. Вывод, который он снял вечером четверга, посчитал исполнителей и потерял условие. Через неделю он повторит число ролей, не заметив, что условия под ним больше нет.</a:t>
+              <a:t>Роли работают на трёх независимых. А теперь поворот, ради которого кейс и собран. Ни одно из пяти средств не ускоряет все шесть кусков. Параллельность лежит в задаче, и в этой её ровно на три куска: роли берут её там, где она есть, и умножают ошибку там, где её нет.</a:t>
+            </a:r>
+          </a:p>
+          <a:p/>
+          <a:p>
+            <a:r>
+              <a:t>Поставьте рядом два числа. Исполнителей, которое вы назвали вслух. И независимых кусков — три.</a:t>
             </a:r>
           </a:p>
           <a:p/>
@@ -1526,20 +1597,20 @@
           <a:p>
             <a:r>
               <a:rPr i="1"/>
-              <a:t>Если спросят, как именно проверять независимость.</a:t>
-            </a:r>
-            <a:r>
-              <a:t> По-инженерному и дёшево: смотрим, пересекаются ли правки по файлам и нужен ли одной из них результат другой. Разные файлы и ни одной общей зависимости — независимы. Один и тот же файл, общий модуль или «сначала переименуем, потом поправим вызовы» — зависимы, и дальше читать стоит уже не как параллельную задачу.</a:t>
+              <a:t>Если спросят, как проверять независимость быстрее, чем мы это сделали.</a:t>
+            </a:r>
+            <a:r>
+              <a:t> По-инженерному и дёшево: смотрим, пересекаются ли куски по файлам и нужен ли одному итог другого. Разные файлы и ни одной общей зависимости — независимы. Один и тот же файл, общий модуль или «сначала переименуем, потом поправим вызовы» — зависимы, и читать их дальше стоит уже не как параллельную работу.</a:t>
             </a:r>
           </a:p>
           <a:p/>
           <a:p>
             <a:r>
               <a:rPr i="1"/>
-              <a:t>Если спросят, что будет, если проверка пройдена, а всё равно не сошлось.</a:t>
-            </a:r>
-            <a:r>
-              <a:t> Это и есть вторая половина кейса. Задачи бывают независимыми по названию и всё-таки оставляют промежуток, за который не отвечает ни одна из ролей, — такой случай разбираем через экран.</a:t>
+              <a:t>Если спросят, выходит ли, что число исполнителей вообще ни при чём.</a:t>
+            </a:r>
+            <a:r>
+              <a:t> При чём, но вторым номером: число исполнителей задаёт потолок выигрыша, а дают выигрыш независимые куски. Там, где независимости нет, рост числа исполнителей меняет знак и начинает работать против. Держать проще всего так: сначала считаем в задаче независимые куски, потом заводим под них исполнителей — ровно столько, сколько кусков насчитали.</a:t>
             </a:r>
           </a:p>
           <a:p/>
@@ -1549,17 +1620,17 @@
               <a:t>Если спросят, откуда берётся «умножают ошибку».</a:t>
             </a:r>
             <a:r>
-              <a:t> Из измерения, оно будет через два экрана, вместе с источником и условиями эксперимента. Сейчас достаточно направления: зависимые шаги, разведённые по ролям, теряют связь, которую следующий шаг должен был увидеть.</a:t>
+              <a:t> Из измерения, оно будет через два экрана, вместе с источником и условиями эксперимента. Сейчас достаточно направления: зависимые шаги, разведённые по исполнителям, теряют связь, которую следующий шаг должен был увидеть.</a:t>
             </a:r>
           </a:p>
           <a:p/>
           <a:p>
             <a:r>
               <a:rPr i="1"/>
-              <a:t>Если спросят, выходит ли, что число ролей вообще ни при чём.</a:t>
-            </a:r>
-            <a:r>
-              <a:t> При чём, но вторым номером: число ролей задаёт потолок выигрыша, а дают выигрыш независимые задачи. Там, где независимости нет, рост числа ролей меняет знак и начинает работать против. Проще всего держать это так: сначала смотрим на задачу и считаем в ней независимые куски, и только потом заводим под них исполнителей — ровно столько, сколько кусков насчитали.</a:t>
+              <a:t>Если спросят про несколько сессий подробнее.</a:t>
+            </a:r>
+            <a:r>
+              <a:t> Папка, которую две сессии правят одновременно, — отдельная развилка со своей ценой и своей защитой, и она разбирается дальше в занятии. Здесь достаточно факта: на наших кусках такое пересечение есть, и оно решает выбор между этой карточкой и соседней.</a:t>
             </a:r>
           </a:p>
         </p:txBody>
@@ -1629,19 +1700,19 @@
           <a:lstStyle/>
           <a:p>
             <a:r>
-              <a:t>Одно уточнение под поворот. Три вызова из четверга действительно шли одновременно: это механика харнесса, настраивать её не нужно. С определённой версии параллельный режим включён по умолчанию в интерактивной сессии — роль уходит в фон, основная сессия продолжает работать, не дожидаясь её.</a:t>
+              <a:t>Одно уточнение под поворот. Три роли на три независимых куска пошли бы одновременно: это механика харнесса, настраивать её не нужно. Роль уходит в фон, основная сессия её не ждёт.</a:t>
             </a:r>
           </a:p>
           <a:p/>
           <a:p>
             <a:r>
-              <a:t>Предел — на одновременность, не на общее число за сессию: по умолчанию двадцать. Двадцать первая параллельно падает явной ошибкой, в очередь не встаёт; число меняется переменной окружения.</a:t>
+              <a:t>Предел — на одновременность, двадцать по умолчанию; двадцать первая падает явной ошибкой и в очередь не встаёт. Общего предела на число ролей за сессию нет.</a:t>
             </a:r>
           </a:p>
           <a:p/>
           <a:p>
             <a:r>
-              <a:t>Запомните, что отсюда следует: одновременность бесплатна. Вся цена решения лежит на первом шаге — на проверке независимости.</a:t>
+              <a:t>Отсюда следует: одновременность бесплатна, и вся цена решения лежит на раскладке.</a:t>
             </a:r>
           </a:p>
           <a:p/>
@@ -1664,7 +1735,7 @@
               <a:t>Если спросят, что будет на двадцать первой задаче при пределе двадцать.</a:t>
             </a:r>
             <a:r>
-              <a:t> Она не потеряется и не подождёт своей очереди сама: харнесс откажет явной ошибкой, и запустить её нужно будет руками, когда освободится место. Молчаливой очереди здесь нет, и это к лучшему — иначе двадцать первая правка тихо ждала бы, пока её считают проверенной.</a:t>
+              <a:t> Она не потеряется и не подождёт своей очереди сама: харнесс откажет явной ошибкой, и запустить её нужно будет руками, когда освободится место. Молчаливой очереди здесь нет, и это к лучшему — иначе двадцать первый кусок тихо ждал бы, пока его считают проверенным.</a:t>
             </a:r>
           </a:p>
           <a:p/>
@@ -1684,7 +1755,7 @@
               <a:t>Если спросят, не стоит ли сразу поднять предел.</a:t>
             </a:r>
             <a:r>
-              <a:t> Двадцать одновременных ролей — это двадцать окон и двадцать счетов за токены. Упереться в двадцать на обычной работе трудно; если упёрлись, стоит сначала перечитать, точно ли там двадцать независимых задач, и только потом трогать переменную.</a:t>
+              <a:t> Двадцать одновременных ролей — это двадцать контекстов и двадцать счетов за токены. Упереться в двадцать на обычной работе трудно; если упёрлись, стоит сначала перечитать, точно ли там двадцать независимых кусков, и только потом трогать переменную.</a:t>
             </a:r>
           </a:p>
           <a:p/>
@@ -1694,7 +1765,7 @@
               <a:t>Если спросят, видно ли, чем занята фоновая роль.</a:t>
             </a:r>
             <a:r>
-              <a:t> Видно, что она работает, и виден её итог. Ход работы — нет, и это та самая потерянная видимость, которую ступень называет ценой делегирования. На трёх независимых правках она почти не мешает: итог каждой проверяется отдельно. На зависимых мешает сильно — именно там нужно было бы видеть, что одна роль успела узнать раньше другой.</a:t>
+              <a:t> Видно, что она работает, и виден её итог. Ход работы — нет, и это та самая потерянная видимость, которую ступень называет ценой делегирования. На трёх независимых кусках она почти не мешает: итог каждого проверяется отдельно. На зависимых мешает сильно — именно там нужно было бы видеть, что одна роль успела узнать раньше другой.</a:t>
             </a:r>
           </a:p>
         </p:txBody>
@@ -4759,11 +4830,11 @@
         <p:spPr>
           <a:xfrm>
             <a:off x="502920" y="943356"/>
-            <a:ext cx="11183112" cy="3749166"/>
+            <a:ext cx="11183112" cy="3990149"/>
           </a:xfrm>
           <a:prstGeom prst="roundRect">
             <a:avLst>
-              <a:gd name="adj" fmla="val 8129"/>
+              <a:gd name="adj" fmla="val 7638"/>
             </a:avLst>
           </a:prstGeom>
           <a:solidFill>
@@ -4807,7 +4878,7 @@
         <p:spPr>
           <a:xfrm>
             <a:off x="685800" y="1126236"/>
-            <a:ext cx="1433359" cy="282067"/>
+            <a:ext cx="999024" cy="282067"/>
           </a:xfrm>
           <a:prstGeom prst="rect">
             <a:avLst/>
@@ -4848,8 +4919,8 @@
         </p:nvSpPr>
         <p:spPr>
           <a:xfrm>
-            <a:off x="2265463" y="1126236"/>
-            <a:ext cx="3570177" cy="282067"/>
+            <a:off x="1831128" y="1126236"/>
+            <a:ext cx="3713726" cy="282067"/>
           </a:xfrm>
           <a:prstGeom prst="rect">
             <a:avLst/>
@@ -4890,8 +4961,8 @@
         </p:nvSpPr>
         <p:spPr>
           <a:xfrm>
-            <a:off x="5981945" y="1126236"/>
-            <a:ext cx="5374902" cy="282067"/>
+            <a:off x="5691158" y="1126236"/>
+            <a:ext cx="5665689" cy="282067"/>
           </a:xfrm>
           <a:prstGeom prst="rect">
             <a:avLst/>
@@ -4933,7 +5004,7 @@
         <p:spPr>
           <a:xfrm>
             <a:off x="685800" y="1408303"/>
-            <a:ext cx="1433359" cy="690371"/>
+            <a:ext cx="999024" cy="836422"/>
           </a:xfrm>
           <a:prstGeom prst="rect">
             <a:avLst/>
@@ -4948,14 +5019,14 @@
           <a:p>
             <a:pPr algn="l">
               <a:lnSpc>
-                <a:spcPts val="1380"/>
+                <a:spcPts val="1322"/>
               </a:lnSpc>
               <a:spcAft>
                 <a:spcPts val="0"/>
               </a:spcAft>
             </a:pPr>
             <a:r>
-              <a:rPr sz="1200" b="0" i="0">
+              <a:rPr sz="1150" b="0" i="0">
                 <a:solidFill>
                   <a:srgbClr val="141B2E"/>
                 </a:solidFill>
@@ -4974,8 +5045,8 @@
         </p:nvSpPr>
         <p:spPr>
           <a:xfrm>
-            <a:off x="2265463" y="1408303"/>
-            <a:ext cx="3570177" cy="690371"/>
+            <a:off x="1831128" y="1408303"/>
+            <a:ext cx="3713726" cy="836422"/>
           </a:xfrm>
           <a:prstGeom prst="rect">
             <a:avLst/>
@@ -4990,14 +5061,14 @@
           <a:p>
             <a:pPr algn="l">
               <a:lnSpc>
-                <a:spcPts val="1380"/>
+                <a:spcPts val="1322"/>
               </a:lnSpc>
               <a:spcAft>
                 <a:spcPts val="0"/>
               </a:spcAft>
             </a:pPr>
             <a:r>
-              <a:rPr sz="1200" b="0" i="0">
+              <a:rPr sz="1150" b="0" i="0">
                 <a:solidFill>
                   <a:srgbClr val="141B2E"/>
                 </a:solidFill>
@@ -5016,8 +5087,8 @@
         </p:nvSpPr>
         <p:spPr>
           <a:xfrm>
-            <a:off x="5981945" y="1408303"/>
-            <a:ext cx="5374902" cy="690371"/>
+            <a:off x="5691158" y="1408303"/>
+            <a:ext cx="5665689" cy="836422"/>
           </a:xfrm>
           <a:prstGeom prst="rect">
             <a:avLst/>
@@ -5032,20 +5103,20 @@
           <a:p>
             <a:pPr algn="l">
               <a:lnSpc>
-                <a:spcPts val="1380"/>
+                <a:spcPts val="1322"/>
               </a:lnSpc>
               <a:spcAft>
                 <a:spcPts val="0"/>
               </a:spcAft>
             </a:pPr>
             <a:r>
-              <a:rPr sz="1200" b="0" i="0">
+              <a:rPr sz="1150" b="0" i="0">
                 <a:solidFill>
                   <a:srgbClr val="141B2E"/>
                 </a:solidFill>
                 <a:latin typeface="Arial"/>
               </a:rPr>
-              <a:t>окно сессии занимает содержимое сорока файлов, из которых для ответа нужен один вывод</a:t>
+              <a:t>контекст сессии занимает содержимое сорока файлов, из которых для правки нужны четыре</a:t>
             </a:r>
           </a:p>
         </p:txBody>
@@ -5058,7 +5129,7 @@
         </p:nvCxnSpPr>
         <p:spPr>
           <a:xfrm>
-            <a:off x="685800" y="2098675"/>
+            <a:off x="685800" y="2244725"/>
             <a:ext cx="10817352" cy="0"/>
           </a:xfrm>
           <a:prstGeom prst="line">
@@ -5093,8 +5164,8 @@
         </p:nvSpPr>
         <p:spPr>
           <a:xfrm>
-            <a:off x="685800" y="2098675"/>
-            <a:ext cx="1433359" cy="690371"/>
+            <a:off x="685800" y="2244725"/>
+            <a:ext cx="999024" cy="668464"/>
           </a:xfrm>
           <a:prstGeom prst="rect">
             <a:avLst/>
@@ -5109,20 +5180,20 @@
           <a:p>
             <a:pPr algn="l">
               <a:lnSpc>
-                <a:spcPts val="1380"/>
+                <a:spcPts val="1322"/>
               </a:lnSpc>
               <a:spcAft>
                 <a:spcPts val="0"/>
               </a:spcAft>
             </a:pPr>
             <a:r>
-              <a:rPr sz="1200" b="0" i="0">
+              <a:rPr sz="1150" b="0" i="0">
                 <a:solidFill>
                   <a:srgbClr val="141B2E"/>
                 </a:solidFill>
                 <a:latin typeface="Arial"/>
               </a:rPr>
-              <a:t>позвать коллегу</a:t>
+              <a:t>вторая сессия</a:t>
             </a:r>
           </a:p>
         </p:txBody>
@@ -5135,8 +5206,8 @@
         </p:nvSpPr>
         <p:spPr>
           <a:xfrm>
-            <a:off x="2265463" y="2098675"/>
-            <a:ext cx="3570177" cy="690371"/>
+            <a:off x="1831128" y="2244725"/>
+            <a:ext cx="3713726" cy="668464"/>
           </a:xfrm>
           <a:prstGeom prst="rect">
             <a:avLst/>
@@ -5151,20 +5222,20 @@
           <a:p>
             <a:pPr algn="l">
               <a:lnSpc>
-                <a:spcPts val="1380"/>
+                <a:spcPts val="1322"/>
               </a:lnSpc>
               <a:spcAft>
                 <a:spcPts val="0"/>
               </a:spcAft>
             </a:pPr>
             <a:r>
-              <a:rPr sz="1200" b="0" i="0">
+              <a:rPr sz="1150" b="0" i="0">
                 <a:solidFill>
                   <a:srgbClr val="141B2E"/>
                 </a:solidFill>
                 <a:latin typeface="Arial"/>
               </a:rPr>
-              <a:t>единственный вариант, который может ответить за минуту — если коллега свеж в теме</a:t>
+              <a:t>рабочий контекст остаётся чистым: сорок файлов ложатся в чужой</a:t>
             </a:r>
           </a:p>
         </p:txBody>
@@ -5177,8 +5248,8 @@
         </p:nvSpPr>
         <p:spPr>
           <a:xfrm>
-            <a:off x="5981945" y="2098675"/>
-            <a:ext cx="5374902" cy="690371"/>
+            <a:off x="5691158" y="2244725"/>
+            <a:ext cx="5665689" cy="668464"/>
           </a:xfrm>
           <a:prstGeom prst="rect">
             <a:avLst/>
@@ -5193,20 +5264,20 @@
           <a:p>
             <a:pPr algn="l">
               <a:lnSpc>
-                <a:spcPts val="1380"/>
+                <a:spcPts val="1322"/>
               </a:lnSpc>
               <a:spcAft>
                 <a:spcPts val="0"/>
               </a:spcAft>
             </a:pPr>
             <a:r>
-              <a:rPr sz="1200" b="0" i="0">
+              <a:rPr sz="1150" b="0" i="0">
                 <a:solidFill>
                   <a:srgbClr val="141B2E"/>
                 </a:solidFill>
                 <a:latin typeface="Arial"/>
               </a:rPr>
-              <a:t>единственный вариант, который зависит от чужого расписания: решает, свободен ли человек прямо сейчас</a:t>
+              <a:t>список придётся переносить руками, и править агент будет по вашему пересказу — условие про старые аккаунты выпадает из пересказа первым</a:t>
             </a:r>
           </a:p>
         </p:txBody>
@@ -5219,7 +5290,7 @@
         </p:nvCxnSpPr>
         <p:spPr>
           <a:xfrm>
-            <a:off x="685800" y="2789047"/>
+            <a:off x="685800" y="2913189"/>
             <a:ext cx="10817352" cy="0"/>
           </a:xfrm>
           <a:prstGeom prst="line">
@@ -5254,8 +5325,8 @@
         </p:nvSpPr>
         <p:spPr>
           <a:xfrm>
-            <a:off x="685800" y="2789047"/>
-            <a:ext cx="1433359" cy="690371"/>
+            <a:off x="685800" y="2913189"/>
+            <a:ext cx="999024" cy="668464"/>
           </a:xfrm>
           <a:prstGeom prst="rect">
             <a:avLst/>
@@ -5270,20 +5341,20 @@
           <a:p>
             <a:pPr algn="l">
               <a:lnSpc>
-                <a:spcPts val="1380"/>
+                <a:spcPts val="1322"/>
               </a:lnSpc>
               <a:spcAft>
                 <a:spcPts val="0"/>
               </a:spcAft>
             </a:pPr>
             <a:r>
-              <a:rPr sz="1200" b="0" i="0">
+              <a:rPr sz="1150" b="0" i="0">
                 <a:solidFill>
                   <a:srgbClr val="141B2E"/>
                 </a:solidFill>
                 <a:latin typeface="Arial"/>
               </a:rPr>
-              <a:t>субагент читает в своём окне</a:t>
+              <a:t>позвать коллегу</a:t>
             </a:r>
           </a:p>
         </p:txBody>
@@ -5296,8 +5367,8 @@
         </p:nvSpPr>
         <p:spPr>
           <a:xfrm>
-            <a:off x="2265463" y="2789047"/>
-            <a:ext cx="3570177" cy="690371"/>
+            <a:off x="1831128" y="2913189"/>
+            <a:ext cx="3713726" cy="668464"/>
           </a:xfrm>
           <a:prstGeom prst="rect">
             <a:avLst/>
@@ -5312,20 +5383,20 @@
           <a:p>
             <a:pPr algn="l">
               <a:lnSpc>
-                <a:spcPts val="1380"/>
+                <a:spcPts val="1322"/>
               </a:lnSpc>
               <a:spcAft>
                 <a:spcPts val="0"/>
               </a:spcAft>
             </a:pPr>
             <a:r>
-              <a:rPr sz="1200" b="0" i="0">
+              <a:rPr sz="1150" b="0" i="0">
                 <a:solidFill>
                   <a:srgbClr val="141B2E"/>
                 </a:solidFill>
                 <a:latin typeface="Arial"/>
               </a:rPr>
-              <a:t>сорок файлов открываются и закрываются в отдельном, одноразовом окне; обратно приходит только итог</a:t>
+              <a:t>единственный вариант, который может ответить за минуту — если коллега свеж в теме</a:t>
             </a:r>
           </a:p>
         </p:txBody>
@@ -5338,8 +5409,8 @@
         </p:nvSpPr>
         <p:spPr>
           <a:xfrm>
-            <a:off x="5981945" y="2789047"/>
-            <a:ext cx="5374902" cy="690371"/>
+            <a:off x="5691158" y="2913189"/>
+            <a:ext cx="5665689" cy="668464"/>
           </a:xfrm>
           <a:prstGeom prst="rect">
             <a:avLst/>
@@ -5354,20 +5425,20 @@
           <a:p>
             <a:pPr algn="l">
               <a:lnSpc>
-                <a:spcPts val="1380"/>
+                <a:spcPts val="1322"/>
               </a:lnSpc>
               <a:spcAft>
                 <a:spcPts val="0"/>
               </a:spcAft>
             </a:pPr>
             <a:r>
-              <a:rPr sz="1200" b="0" i="0">
+              <a:rPr sz="1150" b="0" i="0">
                 <a:solidFill>
                   <a:srgbClr val="141B2E"/>
                 </a:solidFill>
                 <a:latin typeface="Arial"/>
               </a:rPr>
-              <a:t>быстрее не становится: роль открывает и читает все сорок файлов, время чтения то же</a:t>
+              <a:t>единственный вариант, который зависит от чужого расписания: решает, свободен ли человек прямо сейчас</a:t>
             </a:r>
           </a:p>
         </p:txBody>
@@ -5380,7 +5451,7 @@
         </p:nvCxnSpPr>
         <p:spPr>
           <a:xfrm>
-            <a:off x="685800" y="3479418"/>
+            <a:off x="685800" y="3581654"/>
             <a:ext cx="10817352" cy="0"/>
           </a:xfrm>
           <a:prstGeom prst="line">
@@ -5415,8 +5486,8 @@
         </p:nvSpPr>
         <p:spPr>
           <a:xfrm>
-            <a:off x="685800" y="3479418"/>
-            <a:ext cx="1433359" cy="515111"/>
+            <a:off x="685800" y="3581654"/>
+            <a:ext cx="999024" cy="668464"/>
           </a:xfrm>
           <a:prstGeom prst="rect">
             <a:avLst/>
@@ -5431,20 +5502,20 @@
           <a:p>
             <a:pPr algn="l">
               <a:lnSpc>
-                <a:spcPts val="1380"/>
+                <a:spcPts val="1322"/>
               </a:lnSpc>
               <a:spcAft>
                 <a:spcPts val="0"/>
               </a:spcAft>
             </a:pPr>
             <a:r>
-              <a:rPr sz="1200" b="0" i="0">
+              <a:rPr sz="1150" b="0" i="0">
                 <a:solidFill>
                   <a:srgbClr val="141B2E"/>
                 </a:solidFill>
                 <a:latin typeface="Arial"/>
               </a:rPr>
-              <a:t>сохранить вопрос как скилл</a:t>
+              <a:t>поручить роли</a:t>
             </a:r>
           </a:p>
         </p:txBody>
@@ -5457,8 +5528,8 @@
         </p:nvSpPr>
         <p:spPr>
           <a:xfrm>
-            <a:off x="2265463" y="3479418"/>
-            <a:ext cx="3570177" cy="515111"/>
+            <a:off x="1831128" y="3581654"/>
+            <a:ext cx="3713726" cy="668464"/>
           </a:xfrm>
           <a:prstGeom prst="rect">
             <a:avLst/>
@@ -5473,20 +5544,20 @@
           <a:p>
             <a:pPr algn="l">
               <a:lnSpc>
-                <a:spcPts val="1380"/>
+                <a:spcPts val="1322"/>
               </a:lnSpc>
               <a:spcAft>
                 <a:spcPts val="0"/>
               </a:spcAft>
             </a:pPr>
             <a:r>
-              <a:rPr sz="1200" b="0" i="0">
+              <a:rPr sz="1150" b="0" i="0">
                 <a:solidFill>
                   <a:srgbClr val="141B2E"/>
                 </a:solidFill>
                 <a:latin typeface="Arial"/>
               </a:rPr>
-              <a:t>пригодится, если тот же вопрос прозвучит снова</a:t>
+              <a:t>сорок файлов открываются и закрываются в отдельном, одноразовом контексте; список приходит обратно сам, в ту же сессию</a:t>
             </a:r>
           </a:p>
         </p:txBody>
@@ -5499,8 +5570,8 @@
         </p:nvSpPr>
         <p:spPr>
           <a:xfrm>
-            <a:off x="5981945" y="3479418"/>
-            <a:ext cx="5374902" cy="515111"/>
+            <a:off x="5691158" y="3581654"/>
+            <a:ext cx="5665689" cy="668464"/>
           </a:xfrm>
           <a:prstGeom prst="rect">
             <a:avLst/>
@@ -5515,20 +5586,20 @@
           <a:p>
             <a:pPr algn="l">
               <a:lnSpc>
-                <a:spcPts val="1380"/>
+                <a:spcPts val="1322"/>
               </a:lnSpc>
               <a:spcAft>
                 <a:spcPts val="0"/>
               </a:spcAft>
             </a:pPr>
             <a:r>
-              <a:rPr sz="1200" b="0" i="0">
+              <a:rPr sz="1150" b="0" i="0">
                 <a:solidFill>
                   <a:srgbClr val="141B2E"/>
                 </a:solidFill>
                 <a:latin typeface="Arial"/>
               </a:rPr>
-              <a:t>при первом запуске читает те же файлы тем же способом, в той же сессии, если делегирование не заведено отдельно</a:t>
+              <a:t>быстрее не становится: роль открывает и читает все сорок файлов, время чтения то же</a:t>
             </a:r>
           </a:p>
         </p:txBody>
@@ -5541,7 +5612,7 @@
         </p:nvCxnSpPr>
         <p:spPr>
           <a:xfrm>
-            <a:off x="685800" y="3994530"/>
+            <a:off x="685800" y="4250118"/>
             <a:ext cx="10817352" cy="0"/>
           </a:xfrm>
           <a:prstGeom prst="line">
@@ -5576,8 +5647,8 @@
         </p:nvSpPr>
         <p:spPr>
           <a:xfrm>
-            <a:off x="685800" y="3994530"/>
-            <a:ext cx="1433359" cy="515111"/>
+            <a:off x="685800" y="4250118"/>
+            <a:ext cx="999024" cy="500506"/>
           </a:xfrm>
           <a:prstGeom prst="rect">
             <a:avLst/>
@@ -5592,20 +5663,20 @@
           <a:p>
             <a:pPr algn="l">
               <a:lnSpc>
-                <a:spcPts val="1380"/>
+                <a:spcPts val="1322"/>
               </a:lnSpc>
               <a:spcAft>
                 <a:spcPts val="0"/>
               </a:spcAft>
             </a:pPr>
             <a:r>
-              <a:rPr sz="1200" b="0" i="0">
+              <a:rPr sz="1150" b="0" i="0">
                 <a:solidFill>
                   <a:srgbClr val="141B2E"/>
                 </a:solidFill>
                 <a:latin typeface="Arial"/>
               </a:rPr>
-              <a:t>ответить по памяти</a:t>
+              <a:t>править по памяти</a:t>
             </a:r>
           </a:p>
         </p:txBody>
@@ -5618,8 +5689,8 @@
         </p:nvSpPr>
         <p:spPr>
           <a:xfrm>
-            <a:off x="2265463" y="3994530"/>
-            <a:ext cx="3570177" cy="515111"/>
+            <a:off x="1831128" y="4250118"/>
+            <a:ext cx="3713726" cy="500506"/>
           </a:xfrm>
           <a:prstGeom prst="rect">
             <a:avLst/>
@@ -5634,14 +5705,14 @@
           <a:p>
             <a:pPr algn="l">
               <a:lnSpc>
-                <a:spcPts val="1380"/>
+                <a:spcPts val="1322"/>
               </a:lnSpc>
               <a:spcAft>
                 <a:spcPts val="0"/>
               </a:spcAft>
             </a:pPr>
             <a:r>
-              <a:rPr sz="1200" b="0" i="0">
+              <a:rPr sz="1150" b="0" i="0">
                 <a:solidFill>
                   <a:srgbClr val="141B2E"/>
                 </a:solidFill>
@@ -5660,8 +5731,8 @@
         </p:nvSpPr>
         <p:spPr>
           <a:xfrm>
-            <a:off x="5981945" y="3994530"/>
-            <a:ext cx="5374902" cy="515111"/>
+            <a:off x="5691158" y="4250118"/>
+            <a:ext cx="5665689" cy="500506"/>
           </a:xfrm>
           <a:prstGeom prst="rect">
             <a:avLst/>
@@ -5676,20 +5747,20 @@
           <a:p>
             <a:pPr algn="l">
               <a:lnSpc>
-                <a:spcPts val="1380"/>
+                <a:spcPts val="1322"/>
               </a:lnSpc>
               <a:spcAft>
                 <a:spcPts val="0"/>
               </a:spcAft>
             </a:pPr>
             <a:r>
-              <a:rPr sz="1200" b="0" i="0">
+              <a:rPr sz="1150" b="0" i="0">
                 <a:solidFill>
                   <a:srgbClr val="141B2E"/>
                 </a:solidFill>
                 <a:latin typeface="Arial"/>
               </a:rPr>
-              <a:t>проверки нет, а вопрос именно про проверку</a:t>
+              <a:t>четвёртое место — клиентскую проверку — помнит не всякий из тех, кто её писал</a:t>
             </a:r>
           </a:p>
         </p:txBody>
@@ -5702,8 +5773,8 @@
         </p:nvSpPr>
         <p:spPr>
           <a:xfrm>
-            <a:off x="502920" y="4857114"/>
-            <a:ext cx="82296" cy="959358"/>
+            <a:off x="502920" y="5098097"/>
+            <a:ext cx="82296" cy="1124712"/>
           </a:xfrm>
           <a:prstGeom prst="roundRect">
             <a:avLst>
@@ -5748,8 +5819,8 @@
         </p:nvSpPr>
         <p:spPr>
           <a:xfrm>
-            <a:off x="859536" y="4985130"/>
-            <a:ext cx="10643616" cy="703326"/>
+            <a:off x="859536" y="5226113"/>
+            <a:ext cx="10643616" cy="868680"/>
           </a:xfrm>
           <a:prstGeom prst="rect">
             <a:avLst/>
@@ -5764,14 +5835,14 @@
           <a:p>
             <a:pPr algn="l">
               <a:lnSpc>
-                <a:spcPts val="1798"/>
+                <a:spcPts val="1673"/>
               </a:lnSpc>
               <a:spcAft>
                 <a:spcPts val="300"/>
               </a:spcAft>
             </a:pPr>
             <a:r>
-              <a:rPr sz="1450" b="1" i="0">
+              <a:rPr sz="1350" b="1" i="0">
                 <a:solidFill>
                   <a:srgbClr val="141B2E"/>
                 </a:solidFill>
@@ -5780,13 +5851,13 @@
               <a:t>Вывод.</a:t>
             </a:r>
             <a:r>
-              <a:rPr sz="1450" b="1" i="0">
+              <a:rPr sz="1350" b="1" i="0">
                 <a:solidFill>
                   <a:srgbClr val="141B2E"/>
                 </a:solidFill>
                 <a:latin typeface="Arial"/>
               </a:rPr>
-              <a:t> Двадцать минут чтения из сцены остаются двадцатью минутами: сорок файлов — это сорок файлов, где бы их ни читали. Меняется одно — чьё окно их держит. Окно роли закрывается вместе с ней, а в сессию возвращается строка ответа и место, которого в сцене не хватило на собственную правку.</a:t>
+              <a:t> Двадцать минут чтения из сцены остаются двадцатью минутами: сорок файлов — это сорок файлов, где бы их ни читали. Меняются двое. Первое — чей контекст их держит: контекст роли закрывается вместе с ней. Второе — куда возвращается список: от роли он приходит сам, в ту сессию, где лежит правка, из второй сессии его переносите вы.</a:t>
             </a:r>
           </a:p>
         </p:txBody>
@@ -5896,7 +5967,7 @@
                 </a:solidFill>
                 <a:latin typeface="Arial"/>
               </a:rPr>
-              <a:t>Через неделю: то же число ролей, другая задача</a:t>
+              <a:t>Через неделю: один кусок, две роли</a:t>
             </a:r>
           </a:p>
         </p:txBody>
@@ -5909,8 +5980,8 @@
         </p:nvSpPr>
         <p:spPr>
           <a:xfrm>
-            <a:off x="502920" y="1382268"/>
-            <a:ext cx="82296" cy="2164080"/>
+            <a:off x="502920" y="1571244"/>
+            <a:ext cx="82296" cy="1927860"/>
           </a:xfrm>
           <a:prstGeom prst="roundRect">
             <a:avLst>
@@ -5955,8 +6026,8 @@
         </p:nvSpPr>
         <p:spPr>
           <a:xfrm>
-            <a:off x="859536" y="1510284"/>
-            <a:ext cx="10643616" cy="1908048"/>
+            <a:off x="859536" y="1699260"/>
+            <a:ext cx="10643616" cy="1671828"/>
           </a:xfrm>
           <a:prstGeom prst="rect">
             <a:avLst/>
@@ -5984,7 +6055,7 @@
                 </a:solidFill>
                 <a:latin typeface="Arial"/>
               </a:rPr>
-              <a:t>Через неделю правка приходит одна и крупная: новое поле в форме плюс изменение валидации. Разработчик применяет вывод четверга буквально — больше ролей — и заводит вторую: тестировщика, который прогоняет сценарии через форму и проверяет поведение, не только код. Обе роли получают одну и ту же правку. Диф-ревьюер проверяет код, находит, что валидация написана верно, и возвращает </a:t>
+              <a:t>Через неделю разработчик берётся за кусок, который в раскладке стоял неделимым: новое поле и изменение проверки формы. Исполнителей берёт по числу, которое просилось в пятницу, — больше одного, — и зовёт второго: тестировщика, который прогоняет сценарии через форму и проверяет поведение, не только код. Обе роли получают один и тот же кусок. Диф-ревьюер проверяет код, находит, что проверка написана верно, и возвращает </a:t>
             </a:r>
             <a:r>
               <a:rPr sz="1500" b="1" i="0">
@@ -6002,7 +6073,7 @@
                 </a:solidFill>
                 <a:latin typeface="Arial"/>
               </a:rPr>
-              <a:t> — в его формате это означает, что в коде, который он читал, проблем нет. Тестировщик проверяет поведение формы на обычных сценариях, тоже не находит проблем и тоже возвращает </a:t>
+              <a:t>: в коде, который он читал, проблем нет. Тестировщик прогоняет обычные сценарии через форму, проблем не находит и тоже возвращает </a:t>
             </a:r>
             <a:r>
               <a:rPr sz="1500" b="1" i="0">
@@ -6020,7 +6091,7 @@
                 </a:solidFill>
                 <a:latin typeface="Arial"/>
               </a:rPr>
-              <a:t> — в его формате это означает, что форма ведёт себя ожидаемо на тех сценариях, которые он прогнал.</a:t>
+              <a:t>: форма ведёт себя ожидаемо на тех сценариях, которые он прогнал.</a:t>
             </a:r>
           </a:p>
         </p:txBody>
@@ -6033,8 +6104,8 @@
         </p:nvSpPr>
         <p:spPr>
           <a:xfrm>
-            <a:off x="502920" y="4213860"/>
-            <a:ext cx="82296" cy="1455420"/>
+            <a:off x="502920" y="4166616"/>
+            <a:ext cx="82296" cy="1219200"/>
           </a:xfrm>
           <a:prstGeom prst="roundRect">
             <a:avLst>
@@ -6079,8 +6150,8 @@
         </p:nvSpPr>
         <p:spPr>
           <a:xfrm>
-            <a:off x="859536" y="4341876"/>
-            <a:ext cx="10643616" cy="1199388"/>
+            <a:off x="859536" y="4294632"/>
+            <a:ext cx="10643616" cy="963168"/>
           </a:xfrm>
           <a:prstGeom prst="rect">
             <a:avLst/>
@@ -6108,7 +6179,7 @@
                 </a:solidFill>
                 <a:latin typeface="Arial"/>
               </a:rPr>
-              <a:t>Правка уходит в показ. Заказчик вводит email с пробелом перед доменом — сценарий, который не вошёл ни в код, который диф-ревьюер читал построчно, ни в сценарии, которые тестировщик прогонял руками. Оба </a:t>
+              <a:t>Правка уходит в показ. Заказчик вводит адрес с пробелом перед доменом — сценарий, который не вошёл ни в код, прочитанный построчно, ни в список прогнанных сценариев. Оба </a:t>
             </a:r>
             <a:r>
               <a:rPr sz="1500" b="1" i="0">
@@ -6126,7 +6197,7 @@
                 </a:solidFill>
                 <a:latin typeface="Arial"/>
               </a:rPr>
-              <a:t> правдивы по отдельности. Картина, которую разработчик из них собрал, — «правка проверена» — не описывает ничего: между двумя зонами остался промежуток, про который не высказалась ни одна роль.</a:t>
+              <a:t> правдивы по отдельности. Картина, которую разработчик из них собрал, — «кусок проверен» — не описывает ничего: между двумя зонами остался промежуток, про который не высказалась ни одна роль.</a:t>
             </a:r>
           </a:p>
         </p:txBody>
@@ -6331,7 +6402,7 @@
                 </a:solidFill>
                 <a:latin typeface="Arial"/>
               </a:rPr>
-              <a:t> — документация харнесса об устройстве контекстных окон, один показательный сценарий.</a:t>
+              <a:t> — документация харнесса об устройстве контекста, один показательный сценарий.</a:t>
             </a:r>
           </a:p>
         </p:txBody>
@@ -6629,7 +6700,7 @@
                 </a:solidFill>
                 <a:latin typeface="Arial"/>
               </a:rPr>
-              <a:t>Чистое окно — не чистое от всего подряд</a:t>
+              <a:t>Чистый контекст — не от всего подряд</a:t>
             </a:r>
           </a:p>
         </p:txBody>
@@ -6642,7 +6713,7 @@
         </p:nvSpPr>
         <p:spPr>
           <a:xfrm>
-            <a:off x="502920" y="1490472"/>
+            <a:off x="502920" y="1395984"/>
             <a:ext cx="32004" cy="733805"/>
           </a:xfrm>
           <a:prstGeom prst="rect">
@@ -6686,7 +6757,7 @@
         </p:nvSpPr>
         <p:spPr>
           <a:xfrm>
-            <a:off x="772668" y="1545336"/>
+            <a:off x="772668" y="1450848"/>
             <a:ext cx="10730484" cy="624077"/>
           </a:xfrm>
           <a:prstGeom prst="rect">
@@ -6737,8 +6808,8 @@
         </p:nvSpPr>
         <p:spPr>
           <a:xfrm>
-            <a:off x="502920" y="2928366"/>
-            <a:ext cx="82296" cy="982980"/>
+            <a:off x="502920" y="2833878"/>
+            <a:ext cx="82296" cy="1219200"/>
           </a:xfrm>
           <a:prstGeom prst="roundRect">
             <a:avLst>
@@ -6783,8 +6854,8 @@
         </p:nvSpPr>
         <p:spPr>
           <a:xfrm>
-            <a:off x="859536" y="3056382"/>
-            <a:ext cx="10643616" cy="726948"/>
+            <a:off x="859536" y="2961894"/>
+            <a:ext cx="10643616" cy="963168"/>
           </a:xfrm>
           <a:prstGeom prst="rect">
             <a:avLst/>
@@ -6812,7 +6883,7 @@
                 </a:solidFill>
                 <a:latin typeface="Arial"/>
               </a:rPr>
-              <a:t>Фокус из прошлых двух слайдов — про содержимое репозитория. Для того, что подключено MCP-серверами, за этим нужно следить отдельно: тем же списком инструментов роли, который стоял пятым блоком на одностраничнике ступени.</a:t>
+              <a:t>Это третья полоса со схемы базы — «описания подключённых серверов». В контекст роли она переезжает целиком. Для нашего поиска по лимиту участников: если в сессии подключены трекер задач и почтовый сервер из прошлого раздела занятия, роль, которой нужно прочитать сорок файлов кода, получает их описания бесплатно.</a:t>
             </a:r>
           </a:p>
         </p:txBody>
@@ -6825,7 +6896,7 @@
         </p:nvSpPr>
         <p:spPr>
           <a:xfrm>
-            <a:off x="502920" y="4578858"/>
+            <a:off x="502920" y="4720590"/>
             <a:ext cx="82296" cy="982980"/>
           </a:xfrm>
           <a:prstGeom prst="roundRect">
@@ -6871,7 +6942,7 @@
         </p:nvSpPr>
         <p:spPr>
           <a:xfrm>
-            <a:off x="859536" y="4706874"/>
+            <a:off x="859536" y="4848605"/>
             <a:ext cx="10643616" cy="726948"/>
           </a:xfrm>
           <a:prstGeom prst="rect">
@@ -6900,7 +6971,7 @@
                 </a:solidFill>
                 <a:latin typeface="Arial"/>
               </a:rPr>
-              <a:t>Для нашего вопроса про лимит участников: если в родительской сессии подключены трекер задач и почтовый сервер из прошлого раздела занятия, роль, которой нужно просто прочитать сорок файлов кода, получает их описания в своё окно бесплатно — хотя ни трекер, ни почта к вопросу не относятся.</a:t>
+              <a:t>Фокус из прошлых двух слайдов — про содержимое репозитория. За тем, что подключено серверами, следят отдельно: тем же списком инструментов роли, который стоит пятым блоком на одностраничнике ступени.</a:t>
             </a:r>
           </a:p>
         </p:txBody>
@@ -7010,7 +7081,7 @@
                 </a:solidFill>
                 <a:latin typeface="Arial"/>
               </a:rPr>
-              <a:t>Что остаётся в окне после ответа</a:t>
+              <a:t>Что остаётся в контексте после ответа</a:t>
             </a:r>
           </a:p>
         </p:txBody>
@@ -7023,7 +7094,7 @@
         </p:nvSpPr>
         <p:spPr>
           <a:xfrm>
-            <a:off x="502920" y="1086002"/>
+            <a:off x="502920" y="1059027"/>
             <a:ext cx="82296" cy="1219200"/>
           </a:xfrm>
           <a:prstGeom prst="roundRect">
@@ -7069,7 +7140,7 @@
         </p:nvSpPr>
         <p:spPr>
           <a:xfrm>
-            <a:off x="859536" y="1214018"/>
+            <a:off x="859536" y="1187043"/>
             <a:ext cx="10643616" cy="963168"/>
           </a:xfrm>
           <a:prstGeom prst="rect">
@@ -7098,7 +7169,7 @@
                 </a:solidFill>
                 <a:latin typeface="Arial"/>
               </a:rPr>
-              <a:t>Что мы заводим ради контекста — решаем по тому, что останется в окне после ответа, и не по тому, сколько файлов пришлось открыть. Интуиция говорила: отдельный исполнитель прочитает быстрее. Проверка показала: сорок файлов остаются сорока файлами и тем же временем, меняется только то, чьё окно их держит.</a:t>
+              <a:t>Что мы заводим ради контекста — решаем по тому, что останется в контексте после ответа, и не по тому, сколько файлов пришлось открыть. Интуиция говорила: отдельный исполнитель прочитает быстрее. Проверка показала: сорок файлов остаются сорока файлами и тем же временем, а меняются двое — чей контекст их держит и куда сам возвращается итог.</a:t>
             </a:r>
           </a:p>
         </p:txBody>
@@ -7111,12 +7182,12 @@
         </p:nvSpPr>
         <p:spPr>
           <a:xfrm>
-            <a:off x="502920" y="2826410"/>
-            <a:ext cx="11183112" cy="1706499"/>
+            <a:off x="502920" y="2731998"/>
+            <a:ext cx="11183112" cy="1908810"/>
           </a:xfrm>
           <a:prstGeom prst="roundRect">
             <a:avLst>
-              <a:gd name="adj" fmla="val 17861"/>
+              <a:gd name="adj" fmla="val 15968"/>
             </a:avLst>
           </a:prstGeom>
           <a:solidFill>
@@ -7159,7 +7230,7 @@
         </p:nvSpPr>
         <p:spPr>
           <a:xfrm>
-            <a:off x="758952" y="3261893"/>
+            <a:off x="758952" y="3268637"/>
             <a:ext cx="100584" cy="100584"/>
           </a:xfrm>
           <a:prstGeom prst="roundRect">
@@ -7205,8 +7276,8 @@
         </p:nvSpPr>
         <p:spPr>
           <a:xfrm>
-            <a:off x="1106424" y="3045866"/>
-            <a:ext cx="10360152" cy="532638"/>
+            <a:off x="1106424" y="2951454"/>
+            <a:ext cx="10360152" cy="734949"/>
           </a:xfrm>
           <a:prstGeom prst="rect">
             <a:avLst/>
@@ -7234,7 +7305,7 @@
                 </a:solidFill>
                 <a:latin typeface="Arial"/>
               </a:rPr>
-              <a:t>Делегировать чтение имеет смысл, когда то, что нужно вынести из десятков файлов, — короткий вывод: факт, да/нет, список в несколько строк.</a:t>
+              <a:t>Делегировать чтение имеет смысл, когда из десятков файлов нужно вынести короткий вывод: факт, да/нет, список мест в несколько строк, по которому дальше и работают. Сорок файлов поиска, четыре файла правки — ровно этот случай.</a:t>
             </a:r>
           </a:p>
         </p:txBody>
@@ -7247,7 +7318,7 @@
         </p:nvSpPr>
         <p:spPr>
           <a:xfrm>
-            <a:off x="758952" y="3895686"/>
+            <a:off x="758952" y="4003586"/>
             <a:ext cx="100584" cy="100584"/>
           </a:xfrm>
           <a:prstGeom prst="roundRect">
@@ -7293,7 +7364,7 @@
         </p:nvSpPr>
         <p:spPr>
           <a:xfrm>
-            <a:off x="1106424" y="3578504"/>
+            <a:off x="1106424" y="3686403"/>
             <a:ext cx="10360152" cy="734949"/>
           </a:xfrm>
           <a:prstGeom prst="rect">
@@ -7322,7 +7393,7 @@
                 </a:solidFill>
                 <a:latin typeface="Arial"/>
               </a:rPr>
-              <a:t>Если работа продолжается на том же материале — например, рефакторинг тех же сорока файлов, — читать их придётся в любом случае; делать это в своём окне тогда входит в саму работу: дальше с этим содержимым нужно будет работать самому.</a:t>
+              <a:t>Если дальше работать придётся со всем прочитанным объёмом — рефакторинг тех же сорока файлов, — читать их придётся в любом случае; делать это в своём контексте тогда входит в саму работу, потому что с этим содержимым дальше работать вам.</a:t>
             </a:r>
           </a:p>
         </p:txBody>
@@ -7335,7 +7406,7 @@
         </p:nvSpPr>
         <p:spPr>
           <a:xfrm>
-            <a:off x="502920" y="5054117"/>
+            <a:off x="502920" y="5094579"/>
             <a:ext cx="11183112" cy="1059561"/>
           </a:xfrm>
           <a:prstGeom prst="roundRect">
@@ -7383,7 +7454,7 @@
         </p:nvSpPr>
         <p:spPr>
           <a:xfrm>
-            <a:off x="722376" y="5182133"/>
+            <a:off x="722376" y="5222595"/>
             <a:ext cx="10634472" cy="803528"/>
           </a:xfrm>
           <a:prstGeom prst="rect">
@@ -7421,7 +7492,7 @@
                 </a:solidFill>
                 <a:latin typeface="Arial"/>
               </a:rPr>
-              <a:t> Назовите про себя вопрос из своего проекта, ответ на который — одна строка, а чтения под него — полрепозитория. Назвали — вот первый кандидат на делегирование. Если после ответа вы продолжаете работать в тех же файлах, кандидат не он.</a:t>
+              <a:t> Назовите про себя место в своём проекте, где перед правкой приходится искать по десяткам файлов, а находятся три-четыре строки. Назвали — вот первый кандидат на делегирование. Если править вы будете все эти же десятки файлов, кандидат не он.</a:t>
             </a:r>
           </a:p>
         </p:txBody>
@@ -7641,7 +7712,7 @@
         </p:nvSpPr>
         <p:spPr>
           <a:xfrm>
-            <a:off x="585216" y="2447544"/>
+            <a:off x="585216" y="2590038"/>
             <a:ext cx="694944" cy="694944"/>
           </a:xfrm>
           <a:prstGeom prst="ellipse">
@@ -7685,7 +7756,7 @@
         </p:nvSpPr>
         <p:spPr>
           <a:xfrm>
-            <a:off x="585216" y="2447544"/>
+            <a:off x="585216" y="2590038"/>
             <a:ext cx="694944" cy="694944"/>
           </a:xfrm>
           <a:prstGeom prst="rect">
@@ -7727,7 +7798,7 @@
         </p:nvSpPr>
         <p:spPr>
           <a:xfrm>
-            <a:off x="1536192" y="2341625"/>
+            <a:off x="1536192" y="2484120"/>
             <a:ext cx="9144000" cy="906780"/>
           </a:xfrm>
           <a:prstGeom prst="rect">
@@ -7756,7 +7827,7 @@
                 </a:solidFill>
                 <a:latin typeface="Arial"/>
               </a:rPr>
-              <a:t>Три правки, одна очередь. А если разом?</a:t>
+              <a:t>Задача пришла одной фразой. Чем ускоряем?</a:t>
             </a:r>
           </a:p>
         </p:txBody>
@@ -7769,8 +7840,8 @@
         </p:nvSpPr>
         <p:spPr>
           <a:xfrm>
-            <a:off x="822960" y="3559302"/>
-            <a:ext cx="9509760" cy="1139952"/>
+            <a:off x="822960" y="3701796"/>
+            <a:ext cx="9509760" cy="854964"/>
           </a:xfrm>
           <a:prstGeom prst="rect">
             <a:avLst/>
@@ -7798,7 +7869,7 @@
                 </a:solidFill>
                 <a:latin typeface="Arial"/>
               </a:rPr>
-              <a:t>Три независимых изменения ждут проверки одно за другим. Знак вопроса настоящий: через неделю тот же ход обойдётся нашему разработчику дороже, чем сэкономил.</a:t>
+              <a:t>Одна фраза, один срок. Средств ускорить больше одного, и выбирает между ними сама задача.</a:t>
             </a:r>
           </a:p>
         </p:txBody>
@@ -8084,21 +8155,107 @@
                 </a:solidFill>
                 <a:latin typeface="Arial"/>
               </a:rPr>
-              <a:t>Четверг: три проверки разом, и это сработало</a:t>
-            </a:r>
-          </a:p>
-        </p:txBody>
-      </p:sp>
-      <p:sp>
-        <p:nvSpPr>
-          <p:cNvPr id="3" name="Rounded Rectangle 2"/>
+              <a:t>Задача к понедельнику. Раскладываем вместе</a:t>
+            </a:r>
+          </a:p>
+        </p:txBody>
+      </p:sp>
+      <p:sp>
+        <p:nvSpPr>
+          <p:cNvPr id="3" name="Rectangle 2"/>
           <p:cNvSpPr/>
           <p:nvPr/>
         </p:nvSpPr>
         <p:spPr>
           <a:xfrm>
-            <a:off x="502920" y="1383487"/>
-            <a:ext cx="82296" cy="1927860"/>
+            <a:off x="502920" y="1031087"/>
+            <a:ext cx="32004" cy="317754"/>
+          </a:xfrm>
+          <a:prstGeom prst="rect">
+            <a:avLst/>
+          </a:prstGeom>
+          <a:solidFill>
+            <a:srgbClr val="028090"/>
+          </a:solidFill>
+          <a:ln>
+            <a:noFill/>
+          </a:ln>
+          <a:effectLst/>
+        </p:spPr>
+        <p:style>
+          <a:lnRef idx="1">
+            <a:schemeClr val="accent1"/>
+          </a:lnRef>
+          <a:fillRef idx="3">
+            <a:schemeClr val="accent1"/>
+          </a:fillRef>
+          <a:effectRef idx="2">
+            <a:schemeClr val="accent1"/>
+          </a:effectRef>
+          <a:fontRef idx="minor">
+            <a:schemeClr val="lt1"/>
+          </a:fontRef>
+        </p:style>
+        <p:txBody>
+          <a:bodyPr rtlCol="0" anchor="ctr"/>
+          <a:lstStyle/>
+          <a:p>
+            <a:pPr algn="ctr"/>
+          </a:p>
+        </p:txBody>
+      </p:sp>
+      <p:sp>
+        <p:nvSpPr>
+          <p:cNvPr id="4" name="TextBox 3"/>
+          <p:cNvSpPr txBox="1"/>
+          <p:nvPr/>
+        </p:nvSpPr>
+        <p:spPr>
+          <a:xfrm>
+            <a:off x="772668" y="1085951"/>
+            <a:ext cx="10730484" cy="208025"/>
+          </a:xfrm>
+          <a:prstGeom prst="rect">
+            <a:avLst/>
+          </a:prstGeom>
+          <a:noFill/>
+        </p:spPr>
+        <p:txBody>
+          <a:bodyPr wrap="square" lIns="0" rIns="0" tIns="0" bIns="0" anchor="ctr">
+            <a:spAutoFit/>
+          </a:bodyPr>
+          <a:lstStyle/>
+          <a:p>
+            <a:pPr algn="l">
+              <a:lnSpc>
+                <a:spcPts val="1638"/>
+              </a:lnSpc>
+              <a:spcAft>
+                <a:spcPts val="300"/>
+              </a:spcAft>
+            </a:pPr>
+            <a:r>
+              <a:rPr sz="1300" b="0" i="1">
+                <a:solidFill>
+                  <a:srgbClr val="6B7685"/>
+                </a:solidFill>
+                <a:latin typeface="Arial"/>
+              </a:rPr>
+              <a:t>«К понедельнику форма должна быть готова к рекламе.»</a:t>
+            </a:r>
+          </a:p>
+        </p:txBody>
+      </p:sp>
+      <p:sp>
+        <p:nvSpPr>
+          <p:cNvPr id="5" name="Rounded Rectangle 4"/>
+          <p:cNvSpPr/>
+          <p:nvPr/>
+        </p:nvSpPr>
+        <p:spPr>
+          <a:xfrm>
+            <a:off x="502920" y="1677898"/>
+            <a:ext cx="82296" cy="510540"/>
           </a:xfrm>
           <a:prstGeom prst="roundRect">
             <a:avLst>
@@ -8137,14 +8294,14 @@
       </p:sp>
       <p:sp>
         <p:nvSpPr>
-          <p:cNvPr id="4" name="TextBox 3"/>
+          <p:cNvPr id="6" name="TextBox 5"/>
           <p:cNvSpPr txBox="1"/>
           <p:nvPr/>
         </p:nvSpPr>
         <p:spPr>
           <a:xfrm>
-            <a:off x="859536" y="1511503"/>
-            <a:ext cx="10643616" cy="1671828"/>
+            <a:off x="859536" y="1805914"/>
+            <a:ext cx="10643616" cy="254508"/>
           </a:xfrm>
           <a:prstGeom prst="rect">
             <a:avLst/>
@@ -8172,48 +8329,841 @@
                 </a:solidFill>
                 <a:latin typeface="Arial"/>
               </a:rPr>
-              <a:t>Было.</a:t>
-            </a:r>
-            <a:r>
-              <a:rPr sz="1500" b="1" i="0">
-                <a:solidFill>
-                  <a:srgbClr val="141B2E"/>
+              <a:t>Пятница, вечер. Это вся постановка.</a:t>
+            </a:r>
+          </a:p>
+        </p:txBody>
+      </p:sp>
+      <p:sp>
+        <p:nvSpPr>
+          <p:cNvPr id="7" name="Rounded Rectangle 6"/>
+          <p:cNvSpPr/>
+          <p:nvPr/>
+        </p:nvSpPr>
+        <p:spPr>
+          <a:xfrm>
+            <a:off x="502920" y="2480919"/>
+            <a:ext cx="11183112" cy="2730753"/>
+          </a:xfrm>
+          <a:prstGeom prst="roundRect">
+            <a:avLst>
+              <a:gd name="adj" fmla="val 11161"/>
+            </a:avLst>
+          </a:prstGeom>
+          <a:solidFill>
+            <a:srgbClr val="FFFFFF"/>
+          </a:solidFill>
+          <a:ln w="17780">
+            <a:solidFill>
+              <a:srgbClr val="1C7293"/>
+            </a:solidFill>
+          </a:ln>
+          <a:effectLst/>
+        </p:spPr>
+        <p:style>
+          <a:lnRef idx="1">
+            <a:schemeClr val="accent1"/>
+          </a:lnRef>
+          <a:fillRef idx="3">
+            <a:schemeClr val="accent1"/>
+          </a:fillRef>
+          <a:effectRef idx="2">
+            <a:schemeClr val="accent1"/>
+          </a:effectRef>
+          <a:fontRef idx="minor">
+            <a:schemeClr val="lt1"/>
+          </a:fontRef>
+        </p:style>
+        <p:txBody>
+          <a:bodyPr rtlCol="0" anchor="ctr"/>
+          <a:lstStyle/>
+          <a:p>
+            <a:pPr algn="ctr"/>
+          </a:p>
+        </p:txBody>
+      </p:sp>
+      <p:sp>
+        <p:nvSpPr>
+          <p:cNvPr id="8" name="TextBox 7"/>
+          <p:cNvSpPr txBox="1"/>
+          <p:nvPr/>
+        </p:nvSpPr>
+        <p:spPr>
+          <a:xfrm>
+            <a:off x="685800" y="2663799"/>
+            <a:ext cx="5334280" cy="282067"/>
+          </a:xfrm>
+          <a:prstGeom prst="rect">
+            <a:avLst/>
+          </a:prstGeom>
+          <a:noFill/>
+        </p:spPr>
+        <p:txBody>
+          <a:bodyPr wrap="square" lIns="0" rIns="0" tIns="0" bIns="0" anchor="t">
+            <a:spAutoFit/>
+          </a:bodyPr>
+          <a:lstStyle/>
+          <a:p>
+            <a:pPr algn="l">
+              <a:lnSpc>
+                <a:spcPts val="1265"/>
+              </a:lnSpc>
+              <a:spcAft>
+                <a:spcPts val="0"/>
+              </a:spcAft>
+            </a:pPr>
+            <a:r>
+              <a:rPr sz="1150" b="1" i="0">
+                <a:solidFill>
+                  <a:srgbClr val="6B7685"/>
                 </a:solidFill>
                 <a:latin typeface="Arial"/>
               </a:rPr>
-              <a:t> Диф-ревьюер — роль с одностраничника этой ступени — у разработчика уже каждый день в работе. Три независимых изменения — поправки в трёх разных, не связанных друг с другом формах — проверялись одно за другим: запустить проверку первой правки, подождать итог, запустить вторую, снова подождать, и только потом третью. </a:t>
-            </a:r>
-            <a:r>
-              <a:rPr sz="1500" b="1" i="0">
-                <a:solidFill>
-                  <a:srgbClr val="141B2E"/>
+              <a:t>ХОД 1 · ЧТО В ЗАДАЧЕ ЛЕЖИТ</a:t>
+            </a:r>
+          </a:p>
+        </p:txBody>
+      </p:sp>
+      <p:sp>
+        <p:nvSpPr>
+          <p:cNvPr id="9" name="TextBox 8"/>
+          <p:cNvSpPr txBox="1"/>
+          <p:nvPr/>
+        </p:nvSpPr>
+        <p:spPr>
+          <a:xfrm>
+            <a:off x="6166384" y="2663799"/>
+            <a:ext cx="5190463" cy="282067"/>
+          </a:xfrm>
+          <a:prstGeom prst="rect">
+            <a:avLst/>
+          </a:prstGeom>
+          <a:noFill/>
+        </p:spPr>
+        <p:txBody>
+          <a:bodyPr wrap="square" lIns="0" rIns="0" tIns="0" bIns="0" anchor="t">
+            <a:spAutoFit/>
+          </a:bodyPr>
+          <a:lstStyle/>
+          <a:p>
+            <a:pPr algn="l">
+              <a:lnSpc>
+                <a:spcPts val="1265"/>
+              </a:lnSpc>
+              <a:spcAft>
+                <a:spcPts val="0"/>
+              </a:spcAft>
+            </a:pPr>
+            <a:r>
+              <a:rPr sz="1150" b="1" i="0">
+                <a:solidFill>
+                  <a:srgbClr val="6B7685"/>
                 </a:solidFill>
                 <a:latin typeface="Arial"/>
               </a:rPr>
-              <a:t>Стало.</a:t>
-            </a:r>
-            <a:r>
-              <a:rPr sz="1500" b="1" i="0">
+              <a:t>ХОД 2 · ОТ ЧЕГО ЭТО ЗАВИСИТ</a:t>
+            </a:r>
+          </a:p>
+        </p:txBody>
+      </p:sp>
+      <p:sp>
+        <p:nvSpPr>
+          <p:cNvPr id="10" name="TextBox 9"/>
+          <p:cNvSpPr txBox="1"/>
+          <p:nvPr/>
+        </p:nvSpPr>
+        <p:spPr>
+          <a:xfrm>
+            <a:off x="685800" y="2945866"/>
+            <a:ext cx="5334280" cy="347154"/>
+          </a:xfrm>
+          <a:prstGeom prst="rect">
+            <a:avLst/>
+          </a:prstGeom>
+          <a:noFill/>
+        </p:spPr>
+        <p:txBody>
+          <a:bodyPr wrap="square" lIns="0" rIns="0" tIns="0" bIns="0" anchor="ctr">
+            <a:spAutoFit/>
+          </a:bodyPr>
+          <a:lstStyle/>
+          <a:p>
+            <a:pPr algn="l">
+              <a:lnSpc>
+                <a:spcPts val="1437"/>
+              </a:lnSpc>
+              <a:spcAft>
+                <a:spcPts val="0"/>
+              </a:spcAft>
+            </a:pPr>
+            <a:r>
+              <a:rPr sz="1250" b="0" i="0">
                 <a:solidFill>
                   <a:srgbClr val="141B2E"/>
                 </a:solidFill>
                 <a:latin typeface="Arial"/>
               </a:rPr>
-              <a:t> В четверг он запускает все три проверки одним действием, без единой строки настройки: три отдельных вызова одной и той же роли, каждый на свою правку. Роли не знают друг о друге и не делят между собой ничего — у каждой свой контекст, свой набор файлов, нужных для её конкретной правки.</a:t>
-            </a:r>
-          </a:p>
-        </p:txBody>
-      </p:sp>
-      <p:sp>
-        <p:nvSpPr>
-          <p:cNvPr id="5" name="Rounded Rectangle 4"/>
+              <a:t>поле «телефон» и проверка формата</a:t>
+            </a:r>
+          </a:p>
+        </p:txBody>
+      </p:sp>
+      <p:sp>
+        <p:nvSpPr>
+          <p:cNvPr id="11" name="TextBox 10"/>
+          <p:cNvSpPr txBox="1"/>
+          <p:nvPr/>
+        </p:nvSpPr>
+        <p:spPr>
+          <a:xfrm>
+            <a:off x="6166384" y="2945866"/>
+            <a:ext cx="5190463" cy="347154"/>
+          </a:xfrm>
+          <a:prstGeom prst="rect">
+            <a:avLst/>
+          </a:prstGeom>
+          <a:noFill/>
+        </p:spPr>
+        <p:txBody>
+          <a:bodyPr wrap="square" lIns="0" rIns="0" tIns="0" bIns="0" anchor="ctr">
+            <a:spAutoFit/>
+          </a:bodyPr>
+          <a:lstStyle/>
+          <a:p>
+            <a:pPr algn="l">
+              <a:lnSpc>
+                <a:spcPts val="1437"/>
+              </a:lnSpc>
+              <a:spcAft>
+                <a:spcPts val="0"/>
+              </a:spcAft>
+            </a:pPr>
+            <a:r>
+              <a:rPr sz="1250" b="0" i="0">
+                <a:solidFill>
+                  <a:srgbClr val="141B2E"/>
+                </a:solidFill>
+                <a:latin typeface="Arial"/>
+              </a:rPr>
+              <a:t>ни от чего</a:t>
+            </a:r>
+          </a:p>
+        </p:txBody>
+      </p:sp>
+      <p:cxnSp>
+        <p:nvCxnSpPr>
+          <p:cNvPr id="12" name="Connector 11"/>
+          <p:cNvCxnSpPr/>
+          <p:nvPr/>
+        </p:nvCxnSpPr>
+        <p:spPr>
+          <a:xfrm>
+            <a:off x="685800" y="3293021"/>
+            <a:ext cx="10817352" cy="0"/>
+          </a:xfrm>
+          <a:prstGeom prst="line">
+            <a:avLst/>
+          </a:prstGeom>
+          <a:ln w="9525">
+            <a:solidFill>
+              <a:srgbClr val="E5EAF0"/>
+            </a:solidFill>
+          </a:ln>
+        </p:spPr>
+        <p:style>
+          <a:lnRef idx="2">
+            <a:schemeClr val="accent1"/>
+          </a:lnRef>
+          <a:fillRef idx="0">
+            <a:schemeClr val="accent1"/>
+          </a:fillRef>
+          <a:effectRef idx="1">
+            <a:schemeClr val="accent1"/>
+          </a:effectRef>
+          <a:fontRef idx="minor">
+            <a:schemeClr val="tx1"/>
+          </a:fontRef>
+        </p:style>
+      </p:cxnSp>
+      <p:sp>
+        <p:nvSpPr>
+          <p:cNvPr id="13" name="TextBox 12"/>
+          <p:cNvSpPr txBox="1"/>
+          <p:nvPr/>
+        </p:nvSpPr>
+        <p:spPr>
+          <a:xfrm>
+            <a:off x="685800" y="3293021"/>
+            <a:ext cx="5334280" cy="347154"/>
+          </a:xfrm>
+          <a:prstGeom prst="rect">
+            <a:avLst/>
+          </a:prstGeom>
+          <a:noFill/>
+        </p:spPr>
+        <p:txBody>
+          <a:bodyPr wrap="square" lIns="0" rIns="0" tIns="0" bIns="0" anchor="ctr">
+            <a:spAutoFit/>
+          </a:bodyPr>
+          <a:lstStyle/>
+          <a:p>
+            <a:pPr algn="l">
+              <a:lnSpc>
+                <a:spcPts val="1437"/>
+              </a:lnSpc>
+              <a:spcAft>
+                <a:spcPts val="0"/>
+              </a:spcAft>
+            </a:pPr>
+            <a:r>
+              <a:rPr sz="1250" b="0" i="0">
+                <a:solidFill>
+                  <a:srgbClr val="141B2E"/>
+                </a:solidFill>
+                <a:latin typeface="Arial"/>
+              </a:rPr>
+              <a:t>сообщения об ошибках — к одному виду</a:t>
+            </a:r>
+          </a:p>
+        </p:txBody>
+      </p:sp>
+      <p:sp>
+        <p:nvSpPr>
+          <p:cNvPr id="14" name="TextBox 13"/>
+          <p:cNvSpPr txBox="1"/>
+          <p:nvPr/>
+        </p:nvSpPr>
+        <p:spPr>
+          <a:xfrm>
+            <a:off x="6166384" y="3293021"/>
+            <a:ext cx="5190463" cy="347154"/>
+          </a:xfrm>
+          <a:prstGeom prst="rect">
+            <a:avLst/>
+          </a:prstGeom>
+          <a:noFill/>
+        </p:spPr>
+        <p:txBody>
+          <a:bodyPr wrap="square" lIns="0" rIns="0" tIns="0" bIns="0" anchor="ctr">
+            <a:spAutoFit/>
+          </a:bodyPr>
+          <a:lstStyle/>
+          <a:p>
+            <a:pPr algn="l">
+              <a:lnSpc>
+                <a:spcPts val="1437"/>
+              </a:lnSpc>
+              <a:spcAft>
+                <a:spcPts val="0"/>
+              </a:spcAft>
+            </a:pPr>
+            <a:r>
+              <a:rPr sz="1250" b="0" i="0">
+                <a:solidFill>
+                  <a:srgbClr val="141B2E"/>
+                </a:solidFill>
+                <a:latin typeface="Arial"/>
+              </a:rPr>
+              <a:t>тот же файл, что у поля: </a:t>
+            </a:r>
+            <a:r>
+              <a:rPr sz="1250" b="0" i="0">
+                <a:solidFill>
+                  <a:srgbClr val="141B2E"/>
+                </a:solidFill>
+                <a:latin typeface="Consolas"/>
+              </a:rPr>
+              <a:t>src/validate.js</a:t>
+            </a:r>
+          </a:p>
+        </p:txBody>
+      </p:sp>
+      <p:cxnSp>
+        <p:nvCxnSpPr>
+          <p:cNvPr id="15" name="Connector 14"/>
+          <p:cNvCxnSpPr/>
+          <p:nvPr/>
+        </p:nvCxnSpPr>
+        <p:spPr>
+          <a:xfrm>
+            <a:off x="685800" y="3640175"/>
+            <a:ext cx="10817352" cy="0"/>
+          </a:xfrm>
+          <a:prstGeom prst="line">
+            <a:avLst/>
+          </a:prstGeom>
+          <a:ln w="9525">
+            <a:solidFill>
+              <a:srgbClr val="E5EAF0"/>
+            </a:solidFill>
+          </a:ln>
+        </p:spPr>
+        <p:style>
+          <a:lnRef idx="2">
+            <a:schemeClr val="accent1"/>
+          </a:lnRef>
+          <a:fillRef idx="0">
+            <a:schemeClr val="accent1"/>
+          </a:fillRef>
+          <a:effectRef idx="1">
+            <a:schemeClr val="accent1"/>
+          </a:effectRef>
+          <a:fontRef idx="minor">
+            <a:schemeClr val="tx1"/>
+          </a:fontRef>
+        </p:style>
+      </p:cxnSp>
+      <p:sp>
+        <p:nvSpPr>
+          <p:cNvPr id="16" name="TextBox 15"/>
+          <p:cNvSpPr txBox="1"/>
+          <p:nvPr/>
+        </p:nvSpPr>
+        <p:spPr>
+          <a:xfrm>
+            <a:off x="685800" y="3640175"/>
+            <a:ext cx="5334280" cy="347154"/>
+          </a:xfrm>
+          <a:prstGeom prst="rect">
+            <a:avLst/>
+          </a:prstGeom>
+          <a:noFill/>
+        </p:spPr>
+        <p:txBody>
+          <a:bodyPr wrap="square" lIns="0" rIns="0" tIns="0" bIns="0" anchor="ctr">
+            <a:spAutoFit/>
+          </a:bodyPr>
+          <a:lstStyle/>
+          <a:p>
+            <a:pPr algn="l">
+              <a:lnSpc>
+                <a:spcPts val="1437"/>
+              </a:lnSpc>
+              <a:spcAft>
+                <a:spcPts val="0"/>
+              </a:spcAft>
+            </a:pPr>
+            <a:r>
+              <a:rPr sz="1250" b="0" i="0">
+                <a:solidFill>
+                  <a:srgbClr val="141B2E"/>
+                </a:solidFill>
+                <a:latin typeface="Arial"/>
+              </a:rPr>
+              <a:t>текст согласия на обработку данных</a:t>
+            </a:r>
+          </a:p>
+        </p:txBody>
+      </p:sp>
+      <p:sp>
+        <p:nvSpPr>
+          <p:cNvPr id="17" name="TextBox 16"/>
+          <p:cNvSpPr txBox="1"/>
+          <p:nvPr/>
+        </p:nvSpPr>
+        <p:spPr>
+          <a:xfrm>
+            <a:off x="6166384" y="3640175"/>
+            <a:ext cx="5190463" cy="347154"/>
+          </a:xfrm>
+          <a:prstGeom prst="rect">
+            <a:avLst/>
+          </a:prstGeom>
+          <a:noFill/>
+        </p:spPr>
+        <p:txBody>
+          <a:bodyPr wrap="square" lIns="0" rIns="0" tIns="0" bIns="0" anchor="ctr">
+            <a:spAutoFit/>
+          </a:bodyPr>
+          <a:lstStyle/>
+          <a:p>
+            <a:pPr algn="l">
+              <a:lnSpc>
+                <a:spcPts val="1437"/>
+              </a:lnSpc>
+              <a:spcAft>
+                <a:spcPts val="0"/>
+              </a:spcAft>
+            </a:pPr>
+            <a:r>
+              <a:rPr sz="1250" b="0" i="0">
+                <a:solidFill>
+                  <a:srgbClr val="141B2E"/>
+                </a:solidFill>
+                <a:latin typeface="Arial"/>
+              </a:rPr>
+              <a:t>ни от чего</a:t>
+            </a:r>
+          </a:p>
+        </p:txBody>
+      </p:sp>
+      <p:cxnSp>
+        <p:nvCxnSpPr>
+          <p:cNvPr id="18" name="Connector 17"/>
+          <p:cNvCxnSpPr/>
+          <p:nvPr/>
+        </p:nvCxnSpPr>
+        <p:spPr>
+          <a:xfrm>
+            <a:off x="685800" y="3987330"/>
+            <a:ext cx="10817352" cy="0"/>
+          </a:xfrm>
+          <a:prstGeom prst="line">
+            <a:avLst/>
+          </a:prstGeom>
+          <a:ln w="9525">
+            <a:solidFill>
+              <a:srgbClr val="E5EAF0"/>
+            </a:solidFill>
+          </a:ln>
+        </p:spPr>
+        <p:style>
+          <a:lnRef idx="2">
+            <a:schemeClr val="accent1"/>
+          </a:lnRef>
+          <a:fillRef idx="0">
+            <a:schemeClr val="accent1"/>
+          </a:fillRef>
+          <a:effectRef idx="1">
+            <a:schemeClr val="accent1"/>
+          </a:effectRef>
+          <a:fontRef idx="minor">
+            <a:schemeClr val="tx1"/>
+          </a:fontRef>
+        </p:style>
+      </p:cxnSp>
+      <p:sp>
+        <p:nvSpPr>
+          <p:cNvPr id="19" name="TextBox 18"/>
+          <p:cNvSpPr txBox="1"/>
+          <p:nvPr/>
+        </p:nvSpPr>
+        <p:spPr>
+          <a:xfrm>
+            <a:off x="685800" y="3987330"/>
+            <a:ext cx="5334280" cy="347154"/>
+          </a:xfrm>
+          <a:prstGeom prst="rect">
+            <a:avLst/>
+          </a:prstGeom>
+          <a:noFill/>
+        </p:spPr>
+        <p:txBody>
+          <a:bodyPr wrap="square" lIns="0" rIns="0" tIns="0" bIns="0" anchor="ctr">
+            <a:spAutoFit/>
+          </a:bodyPr>
+          <a:lstStyle/>
+          <a:p>
+            <a:pPr algn="l">
+              <a:lnSpc>
+                <a:spcPts val="1437"/>
+              </a:lnSpc>
+              <a:spcAft>
+                <a:spcPts val="0"/>
+              </a:spcAft>
+            </a:pPr>
+            <a:r>
+              <a:rPr sz="1250" b="0" i="0">
+                <a:solidFill>
+                  <a:srgbClr val="141B2E"/>
+                </a:solidFill>
+                <a:latin typeface="Arial"/>
+              </a:rPr>
+              <a:t>проверка формы на узком экране</a:t>
+            </a:r>
+          </a:p>
+        </p:txBody>
+      </p:sp>
+      <p:sp>
+        <p:nvSpPr>
+          <p:cNvPr id="20" name="TextBox 19"/>
+          <p:cNvSpPr txBox="1"/>
+          <p:nvPr/>
+        </p:nvSpPr>
+        <p:spPr>
+          <a:xfrm>
+            <a:off x="6166384" y="3987330"/>
+            <a:ext cx="5190463" cy="347154"/>
+          </a:xfrm>
+          <a:prstGeom prst="rect">
+            <a:avLst/>
+          </a:prstGeom>
+          <a:noFill/>
+        </p:spPr>
+        <p:txBody>
+          <a:bodyPr wrap="square" lIns="0" rIns="0" tIns="0" bIns="0" anchor="ctr">
+            <a:spAutoFit/>
+          </a:bodyPr>
+          <a:lstStyle/>
+          <a:p>
+            <a:pPr algn="l">
+              <a:lnSpc>
+                <a:spcPts val="1437"/>
+              </a:lnSpc>
+              <a:spcAft>
+                <a:spcPts val="0"/>
+              </a:spcAft>
+            </a:pPr>
+            <a:r>
+              <a:rPr sz="1250" b="0" i="0">
+                <a:solidFill>
+                  <a:srgbClr val="141B2E"/>
+                </a:solidFill>
+                <a:latin typeface="Arial"/>
+              </a:rPr>
+              <a:t>после поля: пока поля нет, проверять нечего</a:t>
+            </a:r>
+          </a:p>
+        </p:txBody>
+      </p:sp>
+      <p:cxnSp>
+        <p:nvCxnSpPr>
+          <p:cNvPr id="21" name="Connector 20"/>
+          <p:cNvCxnSpPr/>
+          <p:nvPr/>
+        </p:nvCxnSpPr>
+        <p:spPr>
+          <a:xfrm>
+            <a:off x="685800" y="4334484"/>
+            <a:ext cx="10817352" cy="0"/>
+          </a:xfrm>
+          <a:prstGeom prst="line">
+            <a:avLst/>
+          </a:prstGeom>
+          <a:ln w="9525">
+            <a:solidFill>
+              <a:srgbClr val="E5EAF0"/>
+            </a:solidFill>
+          </a:ln>
+        </p:spPr>
+        <p:style>
+          <a:lnRef idx="2">
+            <a:schemeClr val="accent1"/>
+          </a:lnRef>
+          <a:fillRef idx="0">
+            <a:schemeClr val="accent1"/>
+          </a:fillRef>
+          <a:effectRef idx="1">
+            <a:schemeClr val="accent1"/>
+          </a:effectRef>
+          <a:fontRef idx="minor">
+            <a:schemeClr val="tx1"/>
+          </a:fontRef>
+        </p:style>
+      </p:cxnSp>
+      <p:sp>
+        <p:nvSpPr>
+          <p:cNvPr id="22" name="TextBox 21"/>
+          <p:cNvSpPr txBox="1"/>
+          <p:nvPr/>
+        </p:nvSpPr>
+        <p:spPr>
+          <a:xfrm>
+            <a:off x="685800" y="4334484"/>
+            <a:ext cx="5334280" cy="347154"/>
+          </a:xfrm>
+          <a:prstGeom prst="rect">
+            <a:avLst/>
+          </a:prstGeom>
+          <a:noFill/>
+        </p:spPr>
+        <p:txBody>
+          <a:bodyPr wrap="square" lIns="0" rIns="0" tIns="0" bIns="0" anchor="ctr">
+            <a:spAutoFit/>
+          </a:bodyPr>
+          <a:lstStyle/>
+          <a:p>
+            <a:pPr algn="l">
+              <a:lnSpc>
+                <a:spcPts val="1437"/>
+              </a:lnSpc>
+              <a:spcAft>
+                <a:spcPts val="0"/>
+              </a:spcAft>
+            </a:pPr>
+            <a:r>
+              <a:rPr sz="1250" b="0" i="0">
+                <a:solidFill>
+                  <a:srgbClr val="141B2E"/>
+                </a:solidFill>
+                <a:latin typeface="Arial"/>
+              </a:rPr>
+              <a:t>прогон перед выкладкой: ветка, тесты, сборка</a:t>
+            </a:r>
+          </a:p>
+        </p:txBody>
+      </p:sp>
+      <p:sp>
+        <p:nvSpPr>
+          <p:cNvPr id="23" name="TextBox 22"/>
+          <p:cNvSpPr txBox="1"/>
+          <p:nvPr/>
+        </p:nvSpPr>
+        <p:spPr>
+          <a:xfrm>
+            <a:off x="6166384" y="4334484"/>
+            <a:ext cx="5190463" cy="347154"/>
+          </a:xfrm>
+          <a:prstGeom prst="rect">
+            <a:avLst/>
+          </a:prstGeom>
+          <a:noFill/>
+        </p:spPr>
+        <p:txBody>
+          <a:bodyPr wrap="square" lIns="0" rIns="0" tIns="0" bIns="0" anchor="ctr">
+            <a:spAutoFit/>
+          </a:bodyPr>
+          <a:lstStyle/>
+          <a:p>
+            <a:pPr algn="l">
+              <a:lnSpc>
+                <a:spcPts val="1437"/>
+              </a:lnSpc>
+              <a:spcAft>
+                <a:spcPts val="0"/>
+              </a:spcAft>
+            </a:pPr>
+            <a:r>
+              <a:rPr sz="1250" b="0" i="0">
+                <a:solidFill>
+                  <a:srgbClr val="141B2E"/>
+                </a:solidFill>
+                <a:latin typeface="Arial"/>
+              </a:rPr>
+              <a:t>ни от чего, и повторяется после каждого</a:t>
+            </a:r>
+          </a:p>
+        </p:txBody>
+      </p:sp>
+      <p:cxnSp>
+        <p:nvCxnSpPr>
+          <p:cNvPr id="24" name="Connector 23"/>
+          <p:cNvCxnSpPr/>
+          <p:nvPr/>
+        </p:nvCxnSpPr>
+        <p:spPr>
+          <a:xfrm>
+            <a:off x="685800" y="4681639"/>
+            <a:ext cx="10817352" cy="0"/>
+          </a:xfrm>
+          <a:prstGeom prst="line">
+            <a:avLst/>
+          </a:prstGeom>
+          <a:ln w="9525">
+            <a:solidFill>
+              <a:srgbClr val="E5EAF0"/>
+            </a:solidFill>
+          </a:ln>
+        </p:spPr>
+        <p:style>
+          <a:lnRef idx="2">
+            <a:schemeClr val="accent1"/>
+          </a:lnRef>
+          <a:fillRef idx="0">
+            <a:schemeClr val="accent1"/>
+          </a:fillRef>
+          <a:effectRef idx="1">
+            <a:schemeClr val="accent1"/>
+          </a:effectRef>
+          <a:fontRef idx="minor">
+            <a:schemeClr val="tx1"/>
+          </a:fontRef>
+        </p:style>
+      </p:cxnSp>
+      <p:sp>
+        <p:nvSpPr>
+          <p:cNvPr id="25" name="TextBox 24"/>
+          <p:cNvSpPr txBox="1"/>
+          <p:nvPr/>
+        </p:nvSpPr>
+        <p:spPr>
+          <a:xfrm>
+            <a:off x="685800" y="4681639"/>
+            <a:ext cx="5334280" cy="347154"/>
+          </a:xfrm>
+          <a:prstGeom prst="rect">
+            <a:avLst/>
+          </a:prstGeom>
+          <a:noFill/>
+        </p:spPr>
+        <p:txBody>
+          <a:bodyPr wrap="square" lIns="0" rIns="0" tIns="0" bIns="0" anchor="ctr">
+            <a:spAutoFit/>
+          </a:bodyPr>
+          <a:lstStyle/>
+          <a:p>
+            <a:pPr algn="l">
+              <a:lnSpc>
+                <a:spcPts val="1437"/>
+              </a:lnSpc>
+              <a:spcAft>
+                <a:spcPts val="0"/>
+              </a:spcAft>
+            </a:pPr>
+            <a:r>
+              <a:rPr sz="1250" b="0" i="0">
+                <a:solidFill>
+                  <a:srgbClr val="141B2E"/>
+                </a:solidFill>
+                <a:latin typeface="Arial"/>
+              </a:rPr>
+              <a:t>письмо-подтверждение заявителю</a:t>
+            </a:r>
+          </a:p>
+        </p:txBody>
+      </p:sp>
+      <p:sp>
+        <p:nvSpPr>
+          <p:cNvPr id="26" name="TextBox 25"/>
+          <p:cNvSpPr txBox="1"/>
+          <p:nvPr/>
+        </p:nvSpPr>
+        <p:spPr>
+          <a:xfrm>
+            <a:off x="6166384" y="4681639"/>
+            <a:ext cx="5190463" cy="347154"/>
+          </a:xfrm>
+          <a:prstGeom prst="rect">
+            <a:avLst/>
+          </a:prstGeom>
+          <a:noFill/>
+        </p:spPr>
+        <p:txBody>
+          <a:bodyPr wrap="square" lIns="0" rIns="0" tIns="0" bIns="0" anchor="ctr">
+            <a:spAutoFit/>
+          </a:bodyPr>
+          <a:lstStyle/>
+          <a:p>
+            <a:pPr algn="l">
+              <a:lnSpc>
+                <a:spcPts val="1437"/>
+              </a:lnSpc>
+              <a:spcAft>
+                <a:spcPts val="0"/>
+              </a:spcAft>
+            </a:pPr>
+            <a:r>
+              <a:rPr sz="1250" b="0" i="0">
+                <a:solidFill>
+                  <a:srgbClr val="141B2E"/>
+                </a:solidFill>
+                <a:latin typeface="Arial"/>
+              </a:rPr>
+              <a:t>ни от чего, кода не касается</a:t>
+            </a:r>
+          </a:p>
+        </p:txBody>
+      </p:sp>
+      <p:sp>
+        <p:nvSpPr>
+          <p:cNvPr id="27" name="Rounded Rectangle 26"/>
           <p:cNvSpPr/>
           <p:nvPr/>
         </p:nvSpPr>
         <p:spPr>
           <a:xfrm>
-            <a:off x="502920" y="3978859"/>
-            <a:ext cx="82296" cy="510540"/>
+            <a:off x="502920" y="5504154"/>
+            <a:ext cx="82296" cy="746760"/>
           </a:xfrm>
           <a:prstGeom prst="roundRect">
             <a:avLst>
@@ -8252,14 +9202,14 @@
       </p:sp>
       <p:sp>
         <p:nvSpPr>
-          <p:cNvPr id="6" name="TextBox 5"/>
+          <p:cNvPr id="28" name="TextBox 27"/>
           <p:cNvSpPr txBox="1"/>
           <p:nvPr/>
         </p:nvSpPr>
         <p:spPr>
           <a:xfrm>
-            <a:off x="859536" y="4106875"/>
-            <a:ext cx="10643616" cy="254508"/>
+            <a:off x="859536" y="5632170"/>
+            <a:ext cx="10643616" cy="490727"/>
           </a:xfrm>
           <a:prstGeom prst="rect">
             <a:avLst/>
@@ -8287,87 +9237,8 @@
                 </a:solidFill>
                 <a:latin typeface="Arial"/>
               </a:rPr>
-              <a:t>Итоги приходят примерно тогда же, когда пришёл бы один.</a:t>
-            </a:r>
-          </a:p>
-        </p:txBody>
-      </p:sp>
-      <p:sp>
-        <p:nvSpPr>
-          <p:cNvPr id="7" name="Rounded Rectangle 6"/>
-          <p:cNvSpPr/>
-          <p:nvPr/>
-        </p:nvSpPr>
-        <p:spPr>
-          <a:xfrm>
-            <a:off x="502920" y="5156911"/>
-            <a:ext cx="82296" cy="510540"/>
-          </a:xfrm>
-          <a:prstGeom prst="roundRect">
-            <a:avLst>
-              <a:gd name="adj" fmla="val 50000"/>
-            </a:avLst>
-          </a:prstGeom>
-          <a:solidFill>
-            <a:srgbClr val="F0AB00"/>
-          </a:solidFill>
-          <a:ln>
-            <a:noFill/>
-          </a:ln>
-          <a:effectLst/>
-        </p:spPr>
-        <p:style>
-          <a:lnRef idx="1">
-            <a:schemeClr val="accent1"/>
-          </a:lnRef>
-          <a:fillRef idx="3">
-            <a:schemeClr val="accent1"/>
-          </a:fillRef>
-          <a:effectRef idx="2">
-            <a:schemeClr val="accent1"/>
-          </a:effectRef>
-          <a:fontRef idx="minor">
-            <a:schemeClr val="lt1"/>
-          </a:fontRef>
-        </p:style>
-        <p:txBody>
-          <a:bodyPr rtlCol="0" anchor="ctr"/>
-          <a:lstStyle/>
-          <a:p>
-            <a:pPr algn="ctr"/>
-          </a:p>
-        </p:txBody>
-      </p:sp>
-      <p:sp>
-        <p:nvSpPr>
-          <p:cNvPr id="8" name="TextBox 7"/>
-          <p:cNvSpPr txBox="1"/>
-          <p:nvPr/>
-        </p:nvSpPr>
-        <p:spPr>
-          <a:xfrm>
-            <a:off x="859536" y="5284927"/>
-            <a:ext cx="10643616" cy="254508"/>
-          </a:xfrm>
-          <a:prstGeom prst="rect">
-            <a:avLst/>
-          </a:prstGeom>
-          <a:noFill/>
-        </p:spPr>
-        <p:txBody>
-          <a:bodyPr wrap="square" lIns="0" rIns="0" tIns="0" bIns="0" anchor="ctr">
-            <a:spAutoFit/>
-          </a:bodyPr>
-          <a:lstStyle/>
-          <a:p>
-            <a:pPr algn="l">
-              <a:lnSpc>
-                <a:spcPts val="1860"/>
-              </a:lnSpc>
-              <a:spcAft>
-                <a:spcPts val="300"/>
-              </a:spcAft>
-            </a:pPr>
+              <a:t>Независимых кусков — три из шести.</a:t>
+            </a:r>
             <a:r>
               <a:rPr sz="1500" b="1" i="0">
                 <a:solidFill>
@@ -8375,23 +9246,14 @@
                 </a:solidFill>
                 <a:latin typeface="Arial"/>
               </a:rPr>
-              <a:t>Урок, который он снял в четверг:</a:t>
-            </a:r>
-            <a:r>
-              <a:rPr sz="1500" b="1" i="0">
-                <a:solidFill>
-                  <a:srgbClr val="141B2E"/>
-                </a:solidFill>
-                <a:latin typeface="Arial"/>
-              </a:rPr>
-              <a:t> «Больше ролей — быстрее. Дальше делаем так всегда.»</a:t>
-            </a:r>
-          </a:p>
-        </p:txBody>
-      </p:sp>
-      <p:sp>
-        <p:nvSpPr>
-          <p:cNvPr id="9" name="TextBox 8"/>
+              <a:t> Один ждёт поля. Один лезет в тот же файл. Один повторяется после каждого из остальных.</a:t>
+            </a:r>
+          </a:p>
+        </p:txBody>
+      </p:sp>
+      <p:sp>
+        <p:nvSpPr>
+          <p:cNvPr id="29" name="TextBox 28"/>
           <p:cNvSpPr txBox="1"/>
           <p:nvPr/>
         </p:nvSpPr>
@@ -8494,7 +9356,7 @@
                 </a:solidFill>
                 <a:latin typeface="Arial"/>
               </a:rPr>
-              <a:t>Сработало. Что берём в привычку?</a:t>
+              <a:t>Чем ускоряем?</a:t>
             </a:r>
           </a:p>
         </p:txBody>
@@ -8507,7 +9369,7 @@
         </p:nvSpPr>
         <p:spPr>
           <a:xfrm>
-            <a:off x="502920" y="1978761"/>
+            <a:off x="502920" y="2058314"/>
             <a:ext cx="11183112" cy="822960"/>
           </a:xfrm>
           <a:prstGeom prst="roundRect">
@@ -8555,7 +9417,7 @@
         </p:nvSpPr>
         <p:spPr>
           <a:xfrm>
-            <a:off x="722376" y="2106777"/>
+            <a:off x="722376" y="2186330"/>
             <a:ext cx="10634472" cy="566928"/>
           </a:xfrm>
           <a:prstGeom prst="rect">
@@ -8584,7 +9446,7 @@
                 </a:solidFill>
                 <a:latin typeface="Arial"/>
               </a:rPr>
-              <a:t>«Что из этого стоит взять в привычку? Выберите карточку.»</a:t>
+              <a:t>«Чем ускоряем эту задачу? Выберите карточку — и назовите кусок, на котором ваше средство работает.»</a:t>
             </a:r>
           </a:p>
         </p:txBody>
@@ -8597,12 +9459,12 @@
         </p:nvSpPr>
         <p:spPr>
           <a:xfrm>
-            <a:off x="502920" y="3469233"/>
-            <a:ext cx="2686050" cy="1305306"/>
+            <a:off x="502920" y="3548786"/>
+            <a:ext cx="2119579" cy="1106424"/>
           </a:xfrm>
           <a:prstGeom prst="roundRect">
             <a:avLst>
-              <a:gd name="adj" fmla="val 23350"/>
+              <a:gd name="adj" fmla="val 25000"/>
             </a:avLst>
           </a:prstGeom>
           <a:solidFill>
@@ -8645,8 +9507,8 @@
         </p:nvSpPr>
         <p:spPr>
           <a:xfrm>
-            <a:off x="612648" y="3469233"/>
-            <a:ext cx="2466594" cy="1305306"/>
+            <a:off x="612648" y="3548786"/>
+            <a:ext cx="1900123" cy="1106424"/>
           </a:xfrm>
           <a:prstGeom prst="rect">
             <a:avLst/>
@@ -8674,7 +9536,7 @@
                 </a:solidFill>
                 <a:latin typeface="Arial"/>
               </a:rPr>
-              <a:t>ничего не менять — проверять по одной, это надёжнее</a:t>
+              <a:t>разложить и делать куски по очереди</a:t>
             </a:r>
           </a:p>
         </p:txBody>
@@ -8687,12 +9549,12 @@
         </p:nvSpPr>
         <p:spPr>
           <a:xfrm>
-            <a:off x="3335274" y="3469233"/>
-            <a:ext cx="2686050" cy="1305306"/>
+            <a:off x="2768803" y="3548786"/>
+            <a:ext cx="2119579" cy="1106424"/>
           </a:xfrm>
           <a:prstGeom prst="roundRect">
             <a:avLst>
-              <a:gd name="adj" fmla="val 23350"/>
+              <a:gd name="adj" fmla="val 25000"/>
             </a:avLst>
           </a:prstGeom>
           <a:solidFill>
@@ -8735,8 +9597,8 @@
         </p:nvSpPr>
         <p:spPr>
           <a:xfrm>
-            <a:off x="3445002" y="3469233"/>
-            <a:ext cx="2466594" cy="1305306"/>
+            <a:off x="2878531" y="3548786"/>
+            <a:ext cx="1900123" cy="1106424"/>
           </a:xfrm>
           <a:prstGeom prst="rect">
             <a:avLst/>
@@ -8764,7 +9626,7 @@
                 </a:solidFill>
                 <a:latin typeface="Arial"/>
               </a:rPr>
-              <a:t>объединить все три правки в одно задание для одной роли</a:t>
+              <a:t>вести куски в нескольких сессиях</a:t>
             </a:r>
           </a:p>
         </p:txBody>
@@ -8777,12 +9639,12 @@
         </p:nvSpPr>
         <p:spPr>
           <a:xfrm>
-            <a:off x="6167628" y="3469233"/>
-            <a:ext cx="2686050" cy="1305306"/>
+            <a:off x="5034686" y="3548786"/>
+            <a:ext cx="2119579" cy="1106424"/>
           </a:xfrm>
           <a:prstGeom prst="roundRect">
             <a:avLst>
-              <a:gd name="adj" fmla="val 23350"/>
+              <a:gd name="adj" fmla="val 25000"/>
             </a:avLst>
           </a:prstGeom>
           <a:solidFill>
@@ -8825,8 +9687,8 @@
         </p:nvSpPr>
         <p:spPr>
           <a:xfrm>
-            <a:off x="6277356" y="3469233"/>
-            <a:ext cx="2466594" cy="1305306"/>
+            <a:off x="5144414" y="3548786"/>
+            <a:ext cx="1900123" cy="1106424"/>
           </a:xfrm>
           <a:prstGeom prst="rect">
             <a:avLst/>
@@ -8854,7 +9716,7 @@
                 </a:solidFill>
                 <a:latin typeface="Arial"/>
               </a:rPr>
-              <a:t>сначала проверить, зависят ли правки друг от друга, и только потом запускать по отдельному вызову роли на каждую</a:t>
+              <a:t>раздать куски ролям и запустить разом</a:t>
             </a:r>
           </a:p>
         </p:txBody>
@@ -8867,12 +9729,12 @@
         </p:nvSpPr>
         <p:spPr>
           <a:xfrm>
-            <a:off x="8999982" y="3469233"/>
-            <a:ext cx="2686050" cy="1305306"/>
+            <a:off x="7300569" y="3548786"/>
+            <a:ext cx="2119579" cy="1106424"/>
           </a:xfrm>
           <a:prstGeom prst="roundRect">
             <a:avLst>
-              <a:gd name="adj" fmla="val 23350"/>
+              <a:gd name="adj" fmla="val 25000"/>
             </a:avLst>
           </a:prstGeom>
           <a:solidFill>
@@ -8915,8 +9777,8 @@
         </p:nvSpPr>
         <p:spPr>
           <a:xfrm>
-            <a:off x="9109710" y="3469233"/>
-            <a:ext cx="2466594" cy="1305306"/>
+            <a:off x="7410297" y="3548786"/>
+            <a:ext cx="1900123" cy="1106424"/>
           </a:xfrm>
           <a:prstGeom prst="rect">
             <a:avLst/>
@@ -8944,14 +9806,104 @@
                 </a:solidFill>
                 <a:latin typeface="Arial"/>
               </a:rPr>
-              <a:t>параллелить всегда, по умолчанию</a:t>
-            </a:r>
-          </a:p>
-        </p:txBody>
-      </p:sp>
-      <p:sp>
-        <p:nvSpPr>
-          <p:cNvPr id="13" name="TextBox 12"/>
+              <a:t>вынести повторяемое в проверку, которая гоняется сама</a:t>
+            </a:r>
+          </a:p>
+        </p:txBody>
+      </p:sp>
+      <p:sp>
+        <p:nvSpPr>
+          <p:cNvPr id="13" name="Rounded Rectangle 12"/>
+          <p:cNvSpPr/>
+          <p:nvPr/>
+        </p:nvSpPr>
+        <p:spPr>
+          <a:xfrm>
+            <a:off x="9566452" y="3548786"/>
+            <a:ext cx="2119579" cy="1106424"/>
+          </a:xfrm>
+          <a:prstGeom prst="roundRect">
+            <a:avLst>
+              <a:gd name="adj" fmla="val 25000"/>
+            </a:avLst>
+          </a:prstGeom>
+          <a:solidFill>
+            <a:srgbClr val="F4F7FA"/>
+          </a:solidFill>
+          <a:ln w="15240">
+            <a:solidFill>
+              <a:srgbClr val="E5EAF0"/>
+            </a:solidFill>
+          </a:ln>
+          <a:effectLst/>
+        </p:spPr>
+        <p:style>
+          <a:lnRef idx="1">
+            <a:schemeClr val="accent1"/>
+          </a:lnRef>
+          <a:fillRef idx="3">
+            <a:schemeClr val="accent1"/>
+          </a:fillRef>
+          <a:effectRef idx="2">
+            <a:schemeClr val="accent1"/>
+          </a:effectRef>
+          <a:fontRef idx="minor">
+            <a:schemeClr val="lt1"/>
+          </a:fontRef>
+        </p:style>
+        <p:txBody>
+          <a:bodyPr rtlCol="0" anchor="ctr"/>
+          <a:lstStyle/>
+          <a:p>
+            <a:pPr algn="ctr"/>
+          </a:p>
+        </p:txBody>
+      </p:sp>
+      <p:sp>
+        <p:nvSpPr>
+          <p:cNvPr id="14" name="TextBox 13"/>
+          <p:cNvSpPr txBox="1"/>
+          <p:nvPr/>
+        </p:nvSpPr>
+        <p:spPr>
+          <a:xfrm>
+            <a:off x="9676180" y="3548786"/>
+            <a:ext cx="1900123" cy="1106424"/>
+          </a:xfrm>
+          <a:prstGeom prst="rect">
+            <a:avLst/>
+          </a:prstGeom>
+          <a:noFill/>
+        </p:spPr>
+        <p:txBody>
+          <a:bodyPr wrap="square" lIns="0" rIns="0" tIns="0" bIns="0" anchor="ctr">
+            <a:spAutoFit/>
+          </a:bodyPr>
+          <a:lstStyle/>
+          <a:p>
+            <a:pPr algn="ctr">
+              <a:lnSpc>
+                <a:spcPts val="1565"/>
+              </a:lnSpc>
+              <a:spcAft>
+                <a:spcPts val="0"/>
+              </a:spcAft>
+            </a:pPr>
+            <a:r>
+              <a:rPr sz="1350" b="1" i="0">
+                <a:solidFill>
+                  <a:srgbClr val="141B2E"/>
+                </a:solidFill>
+                <a:latin typeface="Arial"/>
+              </a:rPr>
+              <a:t>сузить задачу — к понедельнику нужно не всё</a:t>
+            </a:r>
+          </a:p>
+        </p:txBody>
+      </p:sp>
+      <p:sp>
+        <p:nvSpPr>
+          <p:cNvPr id="15" name="TextBox 14"/>
           <p:cNvSpPr txBox="1"/>
           <p:nvPr/>
         </p:nvSpPr>
@@ -9067,12 +10019,12 @@
         </p:nvSpPr>
         <p:spPr>
           <a:xfrm>
-            <a:off x="502920" y="1007554"/>
-            <a:ext cx="11183112" cy="3679507"/>
+            <a:off x="502920" y="943356"/>
+            <a:ext cx="11183112" cy="3749166"/>
           </a:xfrm>
           <a:prstGeom prst="roundRect">
             <a:avLst>
-              <a:gd name="adj" fmla="val 8283"/>
+              <a:gd name="adj" fmla="val 8129"/>
             </a:avLst>
           </a:prstGeom>
           <a:solidFill>
@@ -9115,8 +10067,8 @@
         </p:nvSpPr>
         <p:spPr>
           <a:xfrm>
-            <a:off x="685800" y="1190434"/>
-            <a:ext cx="2006058" cy="282067"/>
+            <a:off x="685800" y="1126236"/>
+            <a:ext cx="1730292" cy="282067"/>
           </a:xfrm>
           <a:prstGeom prst="rect">
             <a:avLst/>
@@ -9144,7 +10096,7 @@
                 </a:solidFill>
                 <a:latin typeface="Arial"/>
               </a:rPr>
-              <a:t>ВАРИАНТ</a:t>
+              <a:t>СРЕДСТВО</a:t>
             </a:r>
           </a:p>
         </p:txBody>
@@ -9157,8 +10109,8 @@
         </p:nvSpPr>
         <p:spPr>
           <a:xfrm>
-            <a:off x="2838162" y="1190434"/>
-            <a:ext cx="2616230" cy="282067"/>
+            <a:off x="2562396" y="1126236"/>
+            <a:ext cx="3513030" cy="282067"/>
           </a:xfrm>
           <a:prstGeom prst="rect">
             <a:avLst/>
@@ -9199,8 +10151,8 @@
         </p:nvSpPr>
         <p:spPr>
           <a:xfrm>
-            <a:off x="5600696" y="1190434"/>
-            <a:ext cx="5756151" cy="282067"/>
+            <a:off x="6221730" y="1126236"/>
+            <a:ext cx="5135117" cy="282067"/>
           </a:xfrm>
           <a:prstGeom prst="rect">
             <a:avLst/>
@@ -9241,8 +10193,8 @@
         </p:nvSpPr>
         <p:spPr>
           <a:xfrm>
-            <a:off x="685800" y="1472501"/>
-            <a:ext cx="2006058" cy="529717"/>
+            <a:off x="685800" y="1408303"/>
+            <a:ext cx="1730292" cy="515111"/>
           </a:xfrm>
           <a:prstGeom prst="rect">
             <a:avLst/>
@@ -9257,20 +10209,20 @@
           <a:p>
             <a:pPr algn="l">
               <a:lnSpc>
-                <a:spcPts val="1437"/>
+                <a:spcPts val="1380"/>
               </a:lnSpc>
               <a:spcAft>
                 <a:spcPts val="0"/>
               </a:spcAft>
             </a:pPr>
             <a:r>
-              <a:rPr sz="1250" b="0" i="0">
+              <a:rPr sz="1200" b="0" i="0">
                 <a:solidFill>
                   <a:srgbClr val="141B2E"/>
                 </a:solidFill>
                 <a:latin typeface="Arial"/>
               </a:rPr>
-              <a:t>ничего не менять — по одной</a:t>
+              <a:t>разложить и делать куски по очереди</a:t>
             </a:r>
           </a:p>
         </p:txBody>
@@ -9283,8 +10235,8 @@
         </p:nvSpPr>
         <p:spPr>
           <a:xfrm>
-            <a:off x="2838162" y="1472501"/>
-            <a:ext cx="2616230" cy="529717"/>
+            <a:off x="2562396" y="1408303"/>
+            <a:ext cx="3513030" cy="515111"/>
           </a:xfrm>
           <a:prstGeom prst="rect">
             <a:avLst/>
@@ -9299,20 +10251,20 @@
           <a:p>
             <a:pPr algn="l">
               <a:lnSpc>
-                <a:spcPts val="1437"/>
+                <a:spcPts val="1380"/>
               </a:lnSpc>
               <a:spcAft>
                 <a:spcPts val="0"/>
               </a:spcAft>
             </a:pPr>
             <a:r>
-              <a:rPr sz="1250" b="0" i="0">
+              <a:rPr sz="1200" b="0" i="0">
                 <a:solidFill>
                   <a:srgbClr val="141B2E"/>
                 </a:solidFill>
                 <a:latin typeface="Arial"/>
               </a:rPr>
-              <a:t>простой, предсказуемый порядок</a:t>
+              <a:t>один предсказуемый порядок, ничего ни с чем не сталкивается</a:t>
             </a:r>
           </a:p>
         </p:txBody>
@@ -9325,8 +10277,8 @@
         </p:nvSpPr>
         <p:spPr>
           <a:xfrm>
-            <a:off x="5600696" y="1472501"/>
-            <a:ext cx="5756151" cy="529717"/>
+            <a:off x="6221730" y="1408303"/>
+            <a:ext cx="5135117" cy="515111"/>
           </a:xfrm>
           <a:prstGeom prst="rect">
             <a:avLst/>
@@ -9341,20 +10293,20 @@
           <a:p>
             <a:pPr algn="l">
               <a:lnSpc>
-                <a:spcPts val="1437"/>
+                <a:spcPts val="1380"/>
               </a:lnSpc>
               <a:spcAft>
                 <a:spcPts val="0"/>
               </a:spcAft>
             </a:pPr>
             <a:r>
-              <a:rPr sz="1250" b="0" i="0">
+              <a:rPr sz="1200" b="0" i="0">
                 <a:solidFill>
                   <a:srgbClr val="141B2E"/>
                 </a:solidFill>
                 <a:latin typeface="Arial"/>
               </a:rPr>
-              <a:t>ожидания складываются: три проверки по очереди займут втрое больше, чем одна</a:t>
+              <a:t>три независимых куска ждут друг друга без причины: ожидания складываются</a:t>
             </a:r>
           </a:p>
         </p:txBody>
@@ -9367,7 +10319,7 @@
         </p:nvCxnSpPr>
         <p:spPr>
           <a:xfrm>
-            <a:off x="685800" y="2002218"/>
+            <a:off x="685800" y="1923414"/>
             <a:ext cx="10817352" cy="0"/>
           </a:xfrm>
           <a:prstGeom prst="line">
@@ -9402,8 +10354,8 @@
         </p:nvSpPr>
         <p:spPr>
           <a:xfrm>
-            <a:off x="685800" y="2002218"/>
-            <a:ext cx="2006058" cy="529717"/>
+            <a:off x="685800" y="1923414"/>
+            <a:ext cx="1730292" cy="515111"/>
           </a:xfrm>
           <a:prstGeom prst="rect">
             <a:avLst/>
@@ -9418,20 +10370,20 @@
           <a:p>
             <a:pPr algn="l">
               <a:lnSpc>
-                <a:spcPts val="1437"/>
+                <a:spcPts val="1380"/>
               </a:lnSpc>
               <a:spcAft>
                 <a:spcPts val="0"/>
               </a:spcAft>
             </a:pPr>
             <a:r>
-              <a:rPr sz="1250" b="0" i="0">
+              <a:rPr sz="1200" b="0" i="0">
                 <a:solidFill>
                   <a:srgbClr val="141B2E"/>
                 </a:solidFill>
                 <a:latin typeface="Arial"/>
               </a:rPr>
-              <a:t>объединить три правки в одно задание</a:t>
+              <a:t>вести куски в нескольких сессиях</a:t>
             </a:r>
           </a:p>
         </p:txBody>
@@ -9444,8 +10396,8 @@
         </p:nvSpPr>
         <p:spPr>
           <a:xfrm>
-            <a:off x="2838162" y="2002218"/>
-            <a:ext cx="2616230" cy="529717"/>
+            <a:off x="2562396" y="1923414"/>
+            <a:ext cx="3513030" cy="515111"/>
           </a:xfrm>
           <a:prstGeom prst="rect">
             <a:avLst/>
@@ -9460,20 +10412,20 @@
           <a:p>
             <a:pPr algn="l">
               <a:lnSpc>
-                <a:spcPts val="1437"/>
+                <a:spcPts val="1380"/>
               </a:lnSpc>
               <a:spcAft>
                 <a:spcPts val="0"/>
               </a:spcAft>
             </a:pPr>
             <a:r>
-              <a:rPr sz="1250" b="0" i="0">
+              <a:rPr sz="1200" b="0" i="0">
                 <a:solidFill>
                   <a:srgbClr val="141B2E"/>
                 </a:solidFill>
                 <a:latin typeface="Arial"/>
               </a:rPr>
-              <a:t>один вызов, одна формулировка</a:t>
+              <a:t>куски идут одновременно, у каждой сессии свой контекст</a:t>
             </a:r>
           </a:p>
         </p:txBody>
@@ -9486,8 +10438,8 @@
         </p:nvSpPr>
         <p:spPr>
           <a:xfrm>
-            <a:off x="5600696" y="2002218"/>
-            <a:ext cx="5756151" cy="529717"/>
+            <a:off x="6221730" y="1923414"/>
+            <a:ext cx="5135117" cy="515111"/>
           </a:xfrm>
           <a:prstGeom prst="rect">
             <a:avLst/>
@@ -9502,20 +10454,29 @@
           <a:p>
             <a:pPr algn="l">
               <a:lnSpc>
-                <a:spcPts val="1437"/>
+                <a:spcPts val="1380"/>
               </a:lnSpc>
               <a:spcAft>
                 <a:spcPts val="0"/>
               </a:spcAft>
             </a:pPr>
             <a:r>
-              <a:rPr sz="1250" b="0" i="0">
+              <a:rPr sz="1200" b="0" i="0">
                 <a:solidFill>
                   <a:srgbClr val="141B2E"/>
                 </a:solidFill>
                 <a:latin typeface="Arial"/>
               </a:rPr>
-              <a:t>роль держит три независимых диффа сразу — находки по одной правке легко спутать с находками по другой</a:t>
+              <a:t>две сессии в одной папке правят одни и те же файлы — у нас это поле и сообщения об ошибках, один </a:t>
+            </a:r>
+            <a:r>
+              <a:rPr sz="1200" b="0" i="0">
+                <a:solidFill>
+                  <a:srgbClr val="141B2E"/>
+                </a:solidFill>
+                <a:latin typeface="Consolas"/>
+              </a:rPr>
+              <a:t>src/validate.js</a:t>
             </a:r>
           </a:p>
         </p:txBody>
@@ -9528,7 +10489,7 @@
         </p:nvCxnSpPr>
         <p:spPr>
           <a:xfrm>
-            <a:off x="685800" y="2531935"/>
+            <a:off x="685800" y="2438527"/>
             <a:ext cx="10817352" cy="0"/>
           </a:xfrm>
           <a:prstGeom prst="line">
@@ -9563,8 +10524,8 @@
         </p:nvSpPr>
         <p:spPr>
           <a:xfrm>
-            <a:off x="685800" y="2531935"/>
-            <a:ext cx="2006058" cy="1259966"/>
+            <a:off x="685800" y="2438527"/>
+            <a:ext cx="1730292" cy="690371"/>
           </a:xfrm>
           <a:prstGeom prst="rect">
             <a:avLst/>
@@ -9579,20 +10540,20 @@
           <a:p>
             <a:pPr algn="l">
               <a:lnSpc>
-                <a:spcPts val="1437"/>
+                <a:spcPts val="1380"/>
               </a:lnSpc>
               <a:spcAft>
                 <a:spcPts val="0"/>
               </a:spcAft>
             </a:pPr>
             <a:r>
-              <a:rPr sz="1250" b="0" i="0">
+              <a:rPr sz="1200" b="0" i="0">
                 <a:solidFill>
                   <a:srgbClr val="141B2E"/>
                 </a:solidFill>
                 <a:latin typeface="Arial"/>
               </a:rPr>
-              <a:t>сначала проверить зависимость, потом отдельный вызов роли на каждую задачу параллельно</a:t>
+              <a:t>раздать куски ролям и запустить разом</a:t>
             </a:r>
           </a:p>
         </p:txBody>
@@ -9605,8 +10566,8 @@
         </p:nvSpPr>
         <p:spPr>
           <a:xfrm>
-            <a:off x="2838162" y="2531935"/>
-            <a:ext cx="2616230" cy="1259966"/>
+            <a:off x="2562396" y="2438527"/>
+            <a:ext cx="3513030" cy="690371"/>
           </a:xfrm>
           <a:prstGeom prst="rect">
             <a:avLst/>
@@ -9621,20 +10582,20 @@
           <a:p>
             <a:pPr algn="l">
               <a:lnSpc>
-                <a:spcPts val="1437"/>
+                <a:spcPts val="1380"/>
               </a:lnSpc>
               <a:spcAft>
                 <a:spcPts val="0"/>
               </a:spcAft>
             </a:pPr>
             <a:r>
-              <a:rPr sz="1250" b="0" i="0">
+              <a:rPr sz="1200" b="0" i="0">
                 <a:solidFill>
                   <a:srgbClr val="141B2E"/>
                 </a:solidFill>
                 <a:latin typeface="Arial"/>
               </a:rPr>
-              <a:t>отделяет случай, где параллелить безопасно, от случая, где нет, и даёт каждой задаче своё окно — итоги приходят почти одновременно</a:t>
+              <a:t>одновременность даёт харнесс, настраивать её не нужно; у каждой роли свой контекст и короткий итог</a:t>
             </a:r>
           </a:p>
         </p:txBody>
@@ -9647,8 +10608,8 @@
         </p:nvSpPr>
         <p:spPr>
           <a:xfrm>
-            <a:off x="5600696" y="2531935"/>
-            <a:ext cx="5756151" cy="1259966"/>
+            <a:off x="6221730" y="2438527"/>
+            <a:ext cx="5135117" cy="690371"/>
           </a:xfrm>
           <a:prstGeom prst="rect">
             <a:avLst/>
@@ -9663,20 +10624,20 @@
           <a:p>
             <a:pPr algn="l">
               <a:lnSpc>
-                <a:spcPts val="1437"/>
+                <a:spcPts val="1380"/>
               </a:lnSpc>
               <a:spcAft>
                 <a:spcPts val="0"/>
               </a:spcAft>
             </a:pPr>
             <a:r>
-              <a:rPr sz="1250" b="0" i="0">
+              <a:rPr sz="1200" b="0" i="0">
                 <a:solidFill>
                   <a:srgbClr val="141B2E"/>
                 </a:solidFill>
                 <a:latin typeface="Arial"/>
               </a:rPr>
-              <a:t>держится на первом шаге: без подтверждённой независимости роли увидят разные версии одного и того же кода. Ускоряет второй шаг; первый ничего не ускоряет и нужен целиком ради честности второго</a:t>
+              <a:t>берёт параллельность там, где она есть: на поле и сообщениях две роли увидят разные версии одного файла</a:t>
             </a:r>
           </a:p>
         </p:txBody>
@@ -9689,7 +10650,7 @@
         </p:nvCxnSpPr>
         <p:spPr>
           <a:xfrm>
-            <a:off x="685800" y="3791902"/>
+            <a:off x="685800" y="3128899"/>
             <a:ext cx="10817352" cy="0"/>
           </a:xfrm>
           <a:prstGeom prst="line">
@@ -9724,8 +10685,8 @@
         </p:nvSpPr>
         <p:spPr>
           <a:xfrm>
-            <a:off x="685800" y="3791902"/>
-            <a:ext cx="2006058" cy="712279"/>
+            <a:off x="685800" y="3128899"/>
+            <a:ext cx="1730292" cy="865631"/>
           </a:xfrm>
           <a:prstGeom prst="rect">
             <a:avLst/>
@@ -9740,20 +10701,20 @@
           <a:p>
             <a:pPr algn="l">
               <a:lnSpc>
-                <a:spcPts val="1437"/>
+                <a:spcPts val="1380"/>
               </a:lnSpc>
               <a:spcAft>
                 <a:spcPts val="0"/>
               </a:spcAft>
             </a:pPr>
             <a:r>
-              <a:rPr sz="1250" b="0" i="0">
+              <a:rPr sz="1200" b="0" i="0">
                 <a:solidFill>
                   <a:srgbClr val="141B2E"/>
                 </a:solidFill>
                 <a:latin typeface="Arial"/>
               </a:rPr>
-              <a:t>параллелить всегда, по умолчанию</a:t>
+              <a:t>вынести повторяемое в проверку, которая гоняется сама</a:t>
             </a:r>
           </a:p>
         </p:txBody>
@@ -9766,8 +10727,8 @@
         </p:nvSpPr>
         <p:spPr>
           <a:xfrm>
-            <a:off x="2838162" y="3791902"/>
-            <a:ext cx="2616230" cy="712279"/>
+            <a:off x="2562396" y="3128899"/>
+            <a:ext cx="3513030" cy="865631"/>
           </a:xfrm>
           <a:prstGeom prst="rect">
             <a:avLst/>
@@ -9782,20 +10743,20 @@
           <a:p>
             <a:pPr algn="l">
               <a:lnSpc>
-                <a:spcPts val="1437"/>
+                <a:spcPts val="1380"/>
               </a:lnSpc>
               <a:spcAft>
                 <a:spcPts val="0"/>
               </a:spcAft>
             </a:pPr>
             <a:r>
-              <a:rPr sz="1250" b="0" i="0">
+              <a:rPr sz="1200" b="0" i="0">
                 <a:solidFill>
                   <a:srgbClr val="141B2E"/>
                 </a:solidFill>
                 <a:latin typeface="Arial"/>
               </a:rPr>
-              <a:t>экономит время там, где правки и так независимы</a:t>
+              <a:t>прогон перед выкладкой уходит из очереди совсем — его делает не человек</a:t>
             </a:r>
           </a:p>
         </p:txBody>
@@ -9808,8 +10769,8 @@
         </p:nvSpPr>
         <p:spPr>
           <a:xfrm>
-            <a:off x="5600696" y="3791902"/>
-            <a:ext cx="5756151" cy="712279"/>
+            <a:off x="6221730" y="3128899"/>
+            <a:ext cx="5135117" cy="865631"/>
           </a:xfrm>
           <a:prstGeom prst="rect">
             <a:avLst/>
@@ -9824,34 +10785,195 @@
           <a:p>
             <a:pPr algn="l">
               <a:lnSpc>
-                <a:spcPts val="1437"/>
+                <a:spcPts val="1380"/>
               </a:lnSpc>
               <a:spcAft>
                 <a:spcPts val="0"/>
               </a:spcAft>
             </a:pPr>
             <a:r>
-              <a:rPr sz="1250" b="0" i="0">
+              <a:rPr sz="1200" b="0" i="0">
                 <a:solidFill>
                   <a:srgbClr val="141B2E"/>
                 </a:solidFill>
                 <a:latin typeface="Arial"/>
               </a:rPr>
-              <a:t>там, где шаг одной роли должен видеть вывод другой, у каждой остаётся своя, частично устаревшая картина вместо общего результата</a:t>
-            </a:r>
-          </a:p>
-        </p:txBody>
-      </p:sp>
-      <p:sp>
-        <p:nvSpPr>
-          <p:cNvPr id="22" name="Rounded Rectangle 21"/>
+              <a:t>писать проверку надо заранее и один раз; в пятницу, когда задача уже пришла, она ускорит только следующую такую задачу</a:t>
+            </a:r>
+          </a:p>
+        </p:txBody>
+      </p:sp>
+      <p:cxnSp>
+        <p:nvCxnSpPr>
+          <p:cNvPr id="22" name="Connector 21"/>
+          <p:cNvCxnSpPr/>
+          <p:nvPr/>
+        </p:nvCxnSpPr>
+        <p:spPr>
+          <a:xfrm>
+            <a:off x="685800" y="3994530"/>
+            <a:ext cx="10817352" cy="0"/>
+          </a:xfrm>
+          <a:prstGeom prst="line">
+            <a:avLst/>
+          </a:prstGeom>
+          <a:ln w="9525">
+            <a:solidFill>
+              <a:srgbClr val="E5EAF0"/>
+            </a:solidFill>
+          </a:ln>
+        </p:spPr>
+        <p:style>
+          <a:lnRef idx="2">
+            <a:schemeClr val="accent1"/>
+          </a:lnRef>
+          <a:fillRef idx="0">
+            <a:schemeClr val="accent1"/>
+          </a:fillRef>
+          <a:effectRef idx="1">
+            <a:schemeClr val="accent1"/>
+          </a:effectRef>
+          <a:fontRef idx="minor">
+            <a:schemeClr val="tx1"/>
+          </a:fontRef>
+        </p:style>
+      </p:cxnSp>
+      <p:sp>
+        <p:nvSpPr>
+          <p:cNvPr id="23" name="TextBox 22"/>
+          <p:cNvSpPr txBox="1"/>
+          <p:nvPr/>
+        </p:nvSpPr>
+        <p:spPr>
+          <a:xfrm>
+            <a:off x="685800" y="3994530"/>
+            <a:ext cx="1730292" cy="515111"/>
+          </a:xfrm>
+          <a:prstGeom prst="rect">
+            <a:avLst/>
+          </a:prstGeom>
+          <a:noFill/>
+        </p:spPr>
+        <p:txBody>
+          <a:bodyPr wrap="square" lIns="0" rIns="0" tIns="0" bIns="0" anchor="ctr">
+            <a:spAutoFit/>
+          </a:bodyPr>
+          <a:lstStyle/>
+          <a:p>
+            <a:pPr algn="l">
+              <a:lnSpc>
+                <a:spcPts val="1380"/>
+              </a:lnSpc>
+              <a:spcAft>
+                <a:spcPts val="0"/>
+              </a:spcAft>
+            </a:pPr>
+            <a:r>
+              <a:rPr sz="1200" b="0" i="0">
+                <a:solidFill>
+                  <a:srgbClr val="141B2E"/>
+                </a:solidFill>
+                <a:latin typeface="Arial"/>
+              </a:rPr>
+              <a:t>сузить задачу</a:t>
+            </a:r>
+          </a:p>
+        </p:txBody>
+      </p:sp>
+      <p:sp>
+        <p:nvSpPr>
+          <p:cNvPr id="24" name="TextBox 23"/>
+          <p:cNvSpPr txBox="1"/>
+          <p:nvPr/>
+        </p:nvSpPr>
+        <p:spPr>
+          <a:xfrm>
+            <a:off x="2562396" y="3994530"/>
+            <a:ext cx="3513030" cy="515111"/>
+          </a:xfrm>
+          <a:prstGeom prst="rect">
+            <a:avLst/>
+          </a:prstGeom>
+          <a:noFill/>
+        </p:spPr>
+        <p:txBody>
+          <a:bodyPr wrap="square" lIns="0" rIns="0" tIns="0" bIns="0" anchor="ctr">
+            <a:spAutoFit/>
+          </a:bodyPr>
+          <a:lstStyle/>
+          <a:p>
+            <a:pPr algn="l">
+              <a:lnSpc>
+                <a:spcPts val="1380"/>
+              </a:lnSpc>
+              <a:spcAft>
+                <a:spcPts val="0"/>
+              </a:spcAft>
+            </a:pPr>
+            <a:r>
+              <a:rPr sz="1200" b="0" i="0">
+                <a:solidFill>
+                  <a:srgbClr val="141B2E"/>
+                </a:solidFill>
+                <a:latin typeface="Arial"/>
+              </a:rPr>
+              <a:t>для рекламы нужны поле и согласие — два куска из шести</a:t>
+            </a:r>
+          </a:p>
+        </p:txBody>
+      </p:sp>
+      <p:sp>
+        <p:nvSpPr>
+          <p:cNvPr id="25" name="TextBox 24"/>
+          <p:cNvSpPr txBox="1"/>
+          <p:nvPr/>
+        </p:nvSpPr>
+        <p:spPr>
+          <a:xfrm>
+            <a:off x="6221730" y="3994530"/>
+            <a:ext cx="5135117" cy="515111"/>
+          </a:xfrm>
+          <a:prstGeom prst="rect">
+            <a:avLst/>
+          </a:prstGeom>
+          <a:noFill/>
+        </p:spPr>
+        <p:txBody>
+          <a:bodyPr wrap="square" lIns="0" rIns="0" tIns="0" bIns="0" anchor="ctr">
+            <a:spAutoFit/>
+          </a:bodyPr>
+          <a:lstStyle/>
+          <a:p>
+            <a:pPr algn="l">
+              <a:lnSpc>
+                <a:spcPts val="1380"/>
+              </a:lnSpc>
+              <a:spcAft>
+                <a:spcPts val="0"/>
+              </a:spcAft>
+            </a:pPr>
+            <a:r>
+              <a:rPr sz="1200" b="0" i="0">
+                <a:solidFill>
+                  <a:srgbClr val="141B2E"/>
+                </a:solidFill>
+                <a:latin typeface="Arial"/>
+              </a:rPr>
+              <a:t>решает это не исполнитель: сузить может тот, кто отвечает за срок</a:t>
+            </a:r>
+          </a:p>
+        </p:txBody>
+      </p:sp>
+      <p:sp>
+        <p:nvSpPr>
+          <p:cNvPr id="26" name="Rounded Rectangle 25"/>
           <p:cNvSpPr/>
           <p:nvPr/>
         </p:nvSpPr>
         <p:spPr>
           <a:xfrm>
-            <a:off x="502920" y="5012150"/>
-            <a:ext cx="82296" cy="1219200"/>
+            <a:off x="502920" y="4857114"/>
+            <a:ext cx="82296" cy="1187704"/>
           </a:xfrm>
           <a:prstGeom prst="roundRect">
             <a:avLst>
@@ -9890,14 +11012,14 @@
       </p:sp>
       <p:sp>
         <p:nvSpPr>
-          <p:cNvPr id="23" name="TextBox 22"/>
+          <p:cNvPr id="27" name="TextBox 26"/>
           <p:cNvSpPr txBox="1"/>
           <p:nvPr/>
         </p:nvSpPr>
         <p:spPr>
           <a:xfrm>
-            <a:off x="859536" y="5140166"/>
-            <a:ext cx="10643616" cy="963168"/>
+            <a:off x="859536" y="4985130"/>
+            <a:ext cx="10643616" cy="931672"/>
           </a:xfrm>
           <a:prstGeom prst="rect">
             <a:avLst/>
@@ -9912,14 +11034,14 @@
           <a:p>
             <a:pPr algn="l">
               <a:lnSpc>
-                <a:spcPts val="1860"/>
+                <a:spcPts val="1798"/>
               </a:lnSpc>
               <a:spcAft>
                 <a:spcPts val="300"/>
               </a:spcAft>
             </a:pPr>
             <a:r>
-              <a:rPr sz="1500" b="1" i="0">
+              <a:rPr sz="1450" b="1" i="0">
                 <a:solidFill>
                   <a:srgbClr val="141B2E"/>
                 </a:solidFill>
@@ -9928,20 +11050,20 @@
               <a:t>Поворот.</a:t>
             </a:r>
             <a:r>
-              <a:rPr sz="1500" b="1" i="0">
+              <a:rPr sz="1450" b="1" i="0">
                 <a:solidFill>
                   <a:srgbClr val="141B2E"/>
                 </a:solidFill>
                 <a:latin typeface="Arial"/>
               </a:rPr>
-              <a:t> Выигрыш в четверг дала независимость трёх задач. Роли её только забрали. Параллельность лежит в задаче: роли берут её там, где она есть, и умножают ошибку там, где её нет. Урок, который наш разработчик снял вечером четверга, посчитал исполнителей и не записал условие — через неделю он повторит число и не повторит условие.</a:t>
-            </a:r>
-          </a:p>
-        </p:txBody>
-      </p:sp>
-      <p:sp>
-        <p:nvSpPr>
-          <p:cNvPr id="24" name="TextBox 23"/>
+              <a:t> Ни одно из пяти средств не ускоряет все шесть кусков. Параллельность лежит в задаче, и в этой её ровно на три куска: роли берут её там, где она есть, и умножают ошибку там, где её нет — на куске, который лезет в чужой файл, и на куске, который стоит в очереди. Поставьте рядом два числа: исполнителей, которое вы назвали вслух, и независимых кусков, которое вышло из раскладки.</a:t>
+            </a:r>
+          </a:p>
+        </p:txBody>
+      </p:sp>
+      <p:sp>
+        <p:nvSpPr>
+          <p:cNvPr id="28" name="TextBox 27"/>
           <p:cNvSpPr txBox="1"/>
           <p:nvPr/>
         </p:nvSpPr>
